--- a/labs/lab_1_music_taste_prediction/handin/slides.pptx
+++ b/labs/lab_1_music_taste_prediction/handin/slides.pptx
@@ -17,6 +17,9 @@
     <p:sldId id="265" r:id="rId17"/>
     <p:sldId id="266" r:id="rId18"/>
     <p:sldId id="267" r:id="rId19"/>
+    <p:sldId id="268" r:id="rId20"/>
+    <p:sldId id="269" r:id="rId21"/>
+    <p:sldId id="270" r:id="rId22"/>
   </p:sldIdLst>
   <p:sldSz cx="12191695" cy="6858000" type="screen4x3"/>
   <p:notesSz cx="6858000" cy="9144000"/>
@@ -513,7 +516,7 @@
           <a:lstStyle/>
           <a:p>
             <a:r>
-              <a:t>Ten minutes. The short version: eleven methods, one evaluation protocol written before any result, and a random forest that wins by a small but consistent margin.</a:t>
+              <a:t>Ten minutes. The short version: eleven methods and 44 variants, one evaluation protocol written before any result, and at the top two models that are level on accuracy: a random forest and a kNN on the four strong features. The rule written in advance picks the simpler one.</a:t>
             </a:r>
           </a:p>
         </p:txBody>
@@ -583,7 +586,7 @@
           <a:lstStyle/>
           <a:p>
             <a:r>
-              <a:t>If I had to defend logistic regression instead, I could: it is within noise. The protocol said in advance which end of that trade-off I would take.</a:t>
+              <a:t>p is the corrected resampled t-test. The kNN on four features is the one variant the screen promoted, run here under the full protocol on the same 25 splits; it is the only method inside the one-error band. AdaBoost (0.808) and linear SVM (0.807) sit between RBF SVM and LDA and are left off for space; the full tables are in results/03-sweep.md and results/04-variants.md.</a:t>
             </a:r>
           </a:p>
         </p:txBody>
@@ -653,7 +656,7 @@
           <a:lstStyle/>
           <a:p>
             <a:r>
-              <a:t>make predict reproduces the string byte for byte.</a:t>
+              <a:t>Same 25 splits, the eleven methods plus the promoted variant. Ties go to the fewest tuned parameters, then the simpler method; both top models tune two, and kNN is the simpler. Three answers from five reasonable rules is the honest picture: the top eight are within about two errors of each other. Before the variants the strict rule picked the forest alone; the rule did not change, the table got one row longer.</a:t>
             </a:r>
           </a:p>
         </p:txBody>
@@ -723,7 +726,217 @@
           <a:lstStyle/>
           <a:p>
             <a:r>
-              <a:t>The sweep takes about 36 minutes on four cores; everything else runs in a minute or two.</a:t>
+              <a:t>The rule picks the four-feature kNN: level with the forest on accuracy, the same number of tuned parameters, and a model you can explain in a sentence, a song is liked when the seven to eleven songs nearest to it on those four features mostly were.</a:t>
+            </a:r>
+          </a:p>
+        </p:txBody>
+      </p:sp>
+      <p:sp>
+        <p:nvSpPr>
+          <p:cNvPr id="4" name="Slide Number Placeholder 3"/>
+          <p:cNvSpPr>
+            <a:spLocks noGrp="1"/>
+          </p:cNvSpPr>
+          <p:nvPr>
+            <p:ph type="sldNum" idx="5" sz="quarter"/>
+          </p:nvPr>
+        </p:nvSpPr>
+        <p:spPr/>
+      </p:sp>
+    </p:spTree>
+  </p:cSld>
+  <p:clrMapOvr>
+    <a:masterClrMapping/>
+  </p:clrMapOvr>
+</p:notes>
+</file>
+
+<file path=ppt/notesSlides/notesSlide13.xml><?xml version="1.0" encoding="utf-8"?>
+<p:notes xmlns:a="http://schemas.openxmlformats.org/drawingml/2006/main" xmlns:p="http://schemas.openxmlformats.org/presentationml/2006/main" xmlns:r="http://schemas.openxmlformats.org/officeDocument/2006/relationships">
+  <p:cSld>
+    <p:spTree>
+      <p:nvGrpSpPr>
+        <p:cNvPr id="1" name=""/>
+        <p:cNvGrpSpPr/>
+        <p:nvPr/>
+      </p:nvGrpSpPr>
+      <p:grpSpPr>
+        <a:xfrm>
+          <a:off x="0" y="0"/>
+          <a:ext cx="0" cy="0"/>
+          <a:chOff x="0" y="0"/>
+          <a:chExt cx="0" cy="0"/>
+        </a:xfrm>
+      </p:grpSpPr>
+      <p:sp>
+        <p:nvSpPr>
+          <p:cNvPr id="2" name="Slide Image Placeholder 1"/>
+          <p:cNvSpPr>
+            <a:spLocks noGrp="1"/>
+          </p:cNvSpPr>
+          <p:nvPr>
+            <p:ph type="sldImg" idx="2"/>
+          </p:nvPr>
+        </p:nvSpPr>
+        <p:spPr/>
+      </p:sp>
+      <p:sp>
+        <p:nvSpPr>
+          <p:cNvPr id="3" name="Notes Placeholder 2"/>
+          <p:cNvSpPr>
+            <a:spLocks noGrp="1"/>
+          </p:cNvSpPr>
+          <p:nvPr>
+            <p:ph type="body" idx="3" sz="quarter"/>
+          </p:nvPr>
+        </p:nvSpPr>
+        <p:spPr/>
+        <p:txBody>
+          <a:bodyPr/>
+          <a:lstStyle/>
+          <a:p>
+            <a:r>
+              <a:t>If I had to defend the forest or logistic regression instead, I could: all three are within noise. The protocol said in advance which end of that trade-off I would take.</a:t>
+            </a:r>
+          </a:p>
+        </p:txBody>
+      </p:sp>
+      <p:sp>
+        <p:nvSpPr>
+          <p:cNvPr id="4" name="Slide Number Placeholder 3"/>
+          <p:cNvSpPr>
+            <a:spLocks noGrp="1"/>
+          </p:cNvSpPr>
+          <p:nvPr>
+            <p:ph type="sldNum" idx="5" sz="quarter"/>
+          </p:nvPr>
+        </p:nvSpPr>
+        <p:spPr/>
+      </p:sp>
+    </p:spTree>
+  </p:cSld>
+  <p:clrMapOvr>
+    <a:masterClrMapping/>
+  </p:clrMapOvr>
+</p:notes>
+</file>
+
+<file path=ppt/notesSlides/notesSlide14.xml><?xml version="1.0" encoding="utf-8"?>
+<p:notes xmlns:a="http://schemas.openxmlformats.org/drawingml/2006/main" xmlns:p="http://schemas.openxmlformats.org/presentationml/2006/main" xmlns:r="http://schemas.openxmlformats.org/officeDocument/2006/relationships">
+  <p:cSld>
+    <p:spTree>
+      <p:nvGrpSpPr>
+        <p:cNvPr id="1" name=""/>
+        <p:cNvGrpSpPr/>
+        <p:nvPr/>
+      </p:nvGrpSpPr>
+      <p:grpSpPr>
+        <a:xfrm>
+          <a:off x="0" y="0"/>
+          <a:ext cx="0" cy="0"/>
+          <a:chOff x="0" y="0"/>
+          <a:chExt cx="0" cy="0"/>
+        </a:xfrm>
+      </p:grpSpPr>
+      <p:sp>
+        <p:nvSpPr>
+          <p:cNvPr id="2" name="Slide Image Placeholder 1"/>
+          <p:cNvSpPr>
+            <a:spLocks noGrp="1"/>
+          </p:cNvSpPr>
+          <p:nvPr>
+            <p:ph type="sldImg" idx="2"/>
+          </p:nvPr>
+        </p:nvSpPr>
+        <p:spPr/>
+      </p:sp>
+      <p:sp>
+        <p:nvSpPr>
+          <p:cNvPr id="3" name="Notes Placeholder 2"/>
+          <p:cNvSpPr>
+            <a:spLocks noGrp="1"/>
+          </p:cNvSpPr>
+          <p:nvPr>
+            <p:ph type="body" idx="3" sz="quarter"/>
+          </p:nvPr>
+        </p:nvSpPr>
+        <p:spPr/>
+        <p:txBody>
+          <a:bodyPr/>
+          <a:lstStyle/>
+          <a:p>
+            <a:r>
+              <a:t>make predict reproduces the string byte for byte.</a:t>
+            </a:r>
+          </a:p>
+        </p:txBody>
+      </p:sp>
+      <p:sp>
+        <p:nvSpPr>
+          <p:cNvPr id="4" name="Slide Number Placeholder 3"/>
+          <p:cNvSpPr>
+            <a:spLocks noGrp="1"/>
+          </p:cNvSpPr>
+          <p:nvPr>
+            <p:ph type="sldNum" idx="5" sz="quarter"/>
+          </p:nvPr>
+        </p:nvSpPr>
+        <p:spPr/>
+      </p:sp>
+    </p:spTree>
+  </p:cSld>
+  <p:clrMapOvr>
+    <a:masterClrMapping/>
+  </p:clrMapOvr>
+</p:notes>
+</file>
+
+<file path=ppt/notesSlides/notesSlide15.xml><?xml version="1.0" encoding="utf-8"?>
+<p:notes xmlns:a="http://schemas.openxmlformats.org/drawingml/2006/main" xmlns:p="http://schemas.openxmlformats.org/presentationml/2006/main" xmlns:r="http://schemas.openxmlformats.org/officeDocument/2006/relationships">
+  <p:cSld>
+    <p:spTree>
+      <p:nvGrpSpPr>
+        <p:cNvPr id="1" name=""/>
+        <p:cNvGrpSpPr/>
+        <p:nvPr/>
+      </p:nvGrpSpPr>
+      <p:grpSpPr>
+        <a:xfrm>
+          <a:off x="0" y="0"/>
+          <a:ext cx="0" cy="0"/>
+          <a:chOff x="0" y="0"/>
+          <a:chExt cx="0" cy="0"/>
+        </a:xfrm>
+      </p:grpSpPr>
+      <p:sp>
+        <p:nvSpPr>
+          <p:cNvPr id="2" name="Slide Image Placeholder 1"/>
+          <p:cNvSpPr>
+            <a:spLocks noGrp="1"/>
+          </p:cNvSpPr>
+          <p:nvPr>
+            <p:ph type="sldImg" idx="2"/>
+          </p:nvPr>
+        </p:nvSpPr>
+        <p:spPr/>
+      </p:sp>
+      <p:sp>
+        <p:nvSpPr>
+          <p:cNvPr id="3" name="Notes Placeholder 2"/>
+          <p:cNvSpPr>
+            <a:spLocks noGrp="1"/>
+          </p:cNvSpPr>
+          <p:nvPr>
+            <p:ph type="body" idx="3" sz="quarter"/>
+          </p:nvPr>
+        </p:nvSpPr>
+        <p:spPr/>
+        <p:txBody>
+          <a:bodyPr/>
+          <a:lstStyle/>
+          <a:p>
+            <a:r>
+              <a:t>The sweep takes about 36 minutes on four cores, the four variant families and their synthesis about an hour and a quarter more; everything else runs in a minute or two.</a:t>
             </a:r>
           </a:p>
         </p:txBody>
@@ -1073,7 +1286,7 @@
           <a:lstStyle/>
           <a:p>
             <a:r>
-              <a:t>Nested CV means the score of a tuned method never saw its own validation fold during tuning. Writing the rule first is what makes the choice a judgment rather than picking the biggest number after the fact.</a:t>
+              <a:t>Screen numbers, ten splits, each variant against its own base on the same splits. Two lessons cross families. kNN and the RBF SVM measure distances, so they are the ones the input space matters to: robust scaling broke both, because instrumentalness is so spiked at zero that its interquartile range is nothing and dividing by it makes that one feature the whole distance. And the covariance methods and kNN gained from fewer features, while the line and the forest did not care.</a:t>
             </a:r>
           </a:p>
         </p:txBody>
@@ -1143,7 +1356,7 @@
           <a:lstStyle/>
           <a:p>
             <a:r>
-              <a:t>This is why the comparison is paired. Read naively, everything above LDA looks the same.</a:t>
+              <a:t>Robust across models means the same answer from a line, a covariance, a distance, a kernel and two kinds of tree ensemble. Permutation importance undercounts a feature with a correlated twin: LDA barely uses loudness because energy and acousticness carry the same axis for it.</a:t>
             </a:r>
           </a:p>
         </p:txBody>
@@ -1213,7 +1426,7 @@
           <a:lstStyle/>
           <a:p>
             <a:r>
-              <a:t>p is the corrected resampled t-test. AdaBoost (0.808) and linear SVM (0.807) sit between RBF SVM and LDA and are left off for space; the full table is in results/03-sweep.md. Four methods miss the one-error band by a hair.</a:t>
+              <a:t>Nested CV means the score of a tuned method never saw its own validation fold during tuning. Writing the rule first is what makes the choice a judgment rather than picking the biggest number after the fact.</a:t>
             </a:r>
           </a:p>
         </p:txBody>
@@ -1283,7 +1496,7 @@
           <a:lstStyle/>
           <a:p>
             <a:r>
-              <a:t>Boosting reaches the same place from the other side: low-variance learners, bias removed step by step. It ties with bagging.</a:t>
+              <a:t>This is why the comparison is paired. Read naively, everything above LDA looks the same.</a:t>
             </a:r>
           </a:p>
         </p:txBody>
@@ -4356,7 +4569,7 @@
         <p:spPr>
           <a:xfrm>
             <a:off x="548640" y="4206240"/>
-            <a:ext cx="3484778" cy="1325880"/>
+            <a:ext cx="2533573" cy="1325880"/>
           </a:xfrm>
           <a:prstGeom prst="roundRect">
             <a:avLst>
@@ -4402,7 +4615,7 @@
         <p:spPr>
           <a:xfrm>
             <a:off x="777240" y="4315968"/>
-            <a:ext cx="3027578" cy="1143000"/>
+            <a:ext cx="2076373" cy="1143000"/>
           </a:xfrm>
           <a:prstGeom prst="rect">
             <a:avLst/>
@@ -4446,8 +4659,8 @@
         </p:nvSpPr>
         <p:spPr>
           <a:xfrm>
-            <a:off x="4353458" y="4206240"/>
-            <a:ext cx="3484778" cy="1325880"/>
+            <a:off x="3402253" y="4206240"/>
+            <a:ext cx="2533573" cy="1325880"/>
           </a:xfrm>
           <a:prstGeom prst="roundRect">
             <a:avLst>
@@ -4492,8 +4705,8 @@
         </p:nvSpPr>
         <p:spPr>
           <a:xfrm>
-            <a:off x="4582058" y="4315968"/>
-            <a:ext cx="3027578" cy="1143000"/>
+            <a:off x="3630853" y="4315968"/>
+            <a:ext cx="2076373" cy="1143000"/>
           </a:xfrm>
           <a:prstGeom prst="rect">
             <a:avLst/>
@@ -4524,7 +4737,7 @@
                 </a:solidFill>
                 <a:latin typeface="Calibri"/>
               </a:rPr>
-              <a:t>methods through one protocol</a:t>
+              <a:t>methods through one protocol, then 44 variants of them</a:t>
             </a:r>
           </a:p>
         </p:txBody>
@@ -4537,8 +4750,8 @@
         </p:nvSpPr>
         <p:spPr>
           <a:xfrm>
-            <a:off x="8158276" y="4206240"/>
-            <a:ext cx="3484778" cy="1325880"/>
+            <a:off x="6255867" y="4206240"/>
+            <a:ext cx="2533573" cy="1325880"/>
           </a:xfrm>
           <a:prstGeom prst="roundRect">
             <a:avLst>
@@ -4583,8 +4796,8 @@
         </p:nvSpPr>
         <p:spPr>
           <a:xfrm>
-            <a:off x="8386876" y="4315968"/>
-            <a:ext cx="3027578" cy="1143000"/>
+            <a:off x="6484467" y="4315968"/>
+            <a:ext cx="2076373" cy="1143000"/>
           </a:xfrm>
           <a:prstGeom prst="rect">
             <a:avLst/>
@@ -4615,7 +4828,98 @@
                 </a:solidFill>
                 <a:latin typeface="Calibri"/>
               </a:rPr>
-              <a:t>cross-validated accuracy of the chosen random forest</a:t>
+              <a:t>random forest, the best mean</a:t>
+            </a:r>
+          </a:p>
+        </p:txBody>
+      </p:sp>
+      <p:sp>
+        <p:nvSpPr>
+          <p:cNvPr id="9" name="Rounded Rectangle 8"/>
+          <p:cNvSpPr/>
+          <p:nvPr/>
+        </p:nvSpPr>
+        <p:spPr>
+          <a:xfrm>
+            <a:off x="9109481" y="4206240"/>
+            <a:ext cx="2533573" cy="1325880"/>
+          </a:xfrm>
+          <a:prstGeom prst="roundRect">
+            <a:avLst>
+              <a:gd name="adj" fmla="val 8000"/>
+            </a:avLst>
+          </a:prstGeom>
+          <a:solidFill>
+            <a:srgbClr val="3A2C4A"/>
+          </a:solidFill>
+          <a:ln>
+            <a:noFill/>
+          </a:ln>
+          <a:effectLst/>
+        </p:spPr>
+        <p:style>
+          <a:lnRef idx="1">
+            <a:schemeClr val="accent1"/>
+          </a:lnRef>
+          <a:fillRef idx="3">
+            <a:schemeClr val="accent1"/>
+          </a:fillRef>
+          <a:effectRef idx="2">
+            <a:schemeClr val="accent1"/>
+          </a:effectRef>
+          <a:fontRef idx="minor">
+            <a:schemeClr val="lt1"/>
+          </a:fontRef>
+        </p:style>
+        <p:txBody>
+          <a:bodyPr rtlCol="0" anchor="ctr"/>
+          <a:lstStyle/>
+          <a:p>
+            <a:pPr algn="ctr"/>
+          </a:p>
+        </p:txBody>
+      </p:sp>
+      <p:sp>
+        <p:nvSpPr>
+          <p:cNvPr id="10" name="TextBox 9"/>
+          <p:cNvSpPr txBox="1"/>
+          <p:nvPr/>
+        </p:nvSpPr>
+        <p:spPr>
+          <a:xfrm>
+            <a:off x="9338081" y="4315968"/>
+            <a:ext cx="2076373" cy="1143000"/>
+          </a:xfrm>
+          <a:prstGeom prst="rect">
+            <a:avLst/>
+          </a:prstGeom>
+          <a:noFill/>
+        </p:spPr>
+        <p:txBody>
+          <a:bodyPr wrap="square" lIns="0" rIns="0">
+            <a:spAutoFit/>
+          </a:bodyPr>
+          <a:lstStyle/>
+          <a:p>
+            <a:r>
+              <a:rPr sz="3400" b="1">
+                <a:solidFill>
+                  <a:srgbClr val="C98A12"/>
+                </a:solidFill>
+                <a:latin typeface="Cambria"/>
+              </a:rPr>
+              <a:t>0.826</a:t>
+            </a:r>
+          </a:p>
+          <a:p>
+            <a:r>
+              <a:rPr sz="1300" b="0">
+                <a:solidFill>
+                  <a:srgbClr val="FFFFFF"/>
+                </a:solidFill>
+                <a:latin typeface="Calibri"/>
+              </a:rPr>
+              <a:t>kNN on four features, level with it and chosen by the rule</a:t>
             </a:r>
           </a:p>
         </p:txBody>
@@ -4675,7 +4979,2026 @@
                 </a:solidFill>
                 <a:latin typeface="Cambria"/>
               </a:rPr>
-              <a:t>(4) How sure: a small edge, honestly sized</a:t>
+              <a:t>(3) Paired against the best method</a:t>
+            </a:r>
+          </a:p>
+        </p:txBody>
+      </p:sp>
+      <p:graphicFrame>
+        <p:nvGraphicFramePr>
+          <p:cNvPr id="3" name="Table 2"/>
+          <p:cNvGraphicFramePr>
+            <a:graphicFrameLocks noGrp="1"/>
+          </p:cNvGraphicFramePr>
+          <p:nvPr/>
+        </p:nvGraphicFramePr>
+        <p:xfrm>
+          <a:off x="548640" y="1371600"/>
+          <a:ext cx="11094412" cy="4224528"/>
+        </p:xfrm>
+        <a:graphic>
+          <a:graphicData uri="http://schemas.openxmlformats.org/drawingml/2006/table">
+            <a:tbl>
+              <a:tblPr firstRow="1" bandRow="1">
+                <a:tableStyleId>{5C22544A-7EE6-4342-B048-85BDC9FD1C3A}</a:tableStyleId>
+              </a:tblPr>
+              <a:tblGrid>
+                <a:gridCol w="3011341"/>
+                <a:gridCol w="1267933"/>
+                <a:gridCol w="1426424"/>
+                <a:gridCol w="2377374"/>
+                <a:gridCol w="950949"/>
+                <a:gridCol w="2060391"/>
+              </a:tblGrid>
+              <a:tr h="384048">
+                <a:tc>
+                  <a:txBody>
+                    <a:bodyPr/>
+                    <a:lstStyle/>
+                    <a:p>
+                      <a:r>
+                        <a:rPr sz="1400" b="1">
+                          <a:solidFill>
+                            <a:srgbClr val="FFFFFF"/>
+                          </a:solidFill>
+                          <a:latin typeface="Calibri"/>
+                        </a:rPr>
+                        <a:t>method</a:t>
+                      </a:r>
+                    </a:p>
+                  </a:txBody>
+                  <a:tcPr marL="91440" marR="91440">
+                    <a:solidFill>
+                      <a:srgbClr val="261C33"/>
+                    </a:solidFill>
+                  </a:tcPr>
+                </a:tc>
+                <a:tc>
+                  <a:txBody>
+                    <a:bodyPr/>
+                    <a:lstStyle/>
+                    <a:p>
+                      <a:r>
+                        <a:rPr sz="1400" b="1">
+                          <a:solidFill>
+                            <a:srgbClr val="FFFFFF"/>
+                          </a:solidFill>
+                          <a:latin typeface="Calibri"/>
+                        </a:rPr>
+                        <a:t>accuracy</a:t>
+                      </a:r>
+                    </a:p>
+                  </a:txBody>
+                  <a:tcPr marL="91440" marR="91440">
+                    <a:solidFill>
+                      <a:srgbClr val="261C33"/>
+                    </a:solidFill>
+                  </a:tcPr>
+                </a:tc>
+                <a:tc>
+                  <a:txBody>
+                    <a:bodyPr/>
+                    <a:lstStyle/>
+                    <a:p>
+                      <a:r>
+                        <a:rPr sz="1400" b="1">
+                          <a:solidFill>
+                            <a:srgbClr val="FFFFFF"/>
+                          </a:solidFill>
+                          <a:latin typeface="Calibri"/>
+                        </a:rPr>
+                        <a:t>gap to rf</a:t>
+                      </a:r>
+                    </a:p>
+                  </a:txBody>
+                  <a:tcPr marL="91440" marR="91440">
+                    <a:solidFill>
+                      <a:srgbClr val="261C33"/>
+                    </a:solidFill>
+                  </a:tcPr>
+                </a:tc>
+                <a:tc>
+                  <a:txBody>
+                    <a:bodyPr/>
+                    <a:lstStyle/>
+                    <a:p>
+                      <a:r>
+                        <a:rPr sz="1400" b="1">
+                          <a:solidFill>
+                            <a:srgbClr val="FFFFFF"/>
+                          </a:solidFill>
+                          <a:latin typeface="Calibri"/>
+                        </a:rPr>
+                        <a:t>corrected error</a:t>
+                      </a:r>
+                    </a:p>
+                  </a:txBody>
+                  <a:tcPr marL="91440" marR="91440">
+                    <a:solidFill>
+                      <a:srgbClr val="261C33"/>
+                    </a:solidFill>
+                  </a:tcPr>
+                </a:tc>
+                <a:tc>
+                  <a:txBody>
+                    <a:bodyPr/>
+                    <a:lstStyle/>
+                    <a:p>
+                      <a:r>
+                        <a:rPr sz="1400" b="1">
+                          <a:solidFill>
+                            <a:srgbClr val="FFFFFF"/>
+                          </a:solidFill>
+                          <a:latin typeface="Calibri"/>
+                        </a:rPr>
+                        <a:t>p</a:t>
+                      </a:r>
+                    </a:p>
+                  </a:txBody>
+                  <a:tcPr marL="91440" marR="91440">
+                    <a:solidFill>
+                      <a:srgbClr val="261C33"/>
+                    </a:solidFill>
+                  </a:tcPr>
+                </a:tc>
+                <a:tc>
+                  <a:txBody>
+                    <a:bodyPr/>
+                    <a:lstStyle/>
+                    <a:p>
+                      <a:r>
+                        <a:rPr sz="1400" b="1">
+                          <a:solidFill>
+                            <a:srgbClr val="FFFFFF"/>
+                          </a:solidFill>
+                          <a:latin typeface="Calibri"/>
+                        </a:rPr>
+                        <a:t>rf wins of 25</a:t>
+                      </a:r>
+                    </a:p>
+                  </a:txBody>
+                  <a:tcPr marL="91440" marR="91440">
+                    <a:solidFill>
+                      <a:srgbClr val="261C33"/>
+                    </a:solidFill>
+                  </a:tcPr>
+                </a:tc>
+              </a:tr>
+              <a:tr h="384048">
+                <a:tc>
+                  <a:txBody>
+                    <a:bodyPr/>
+                    <a:lstStyle/>
+                    <a:p>
+                      <a:r>
+                        <a:rPr sz="1400" b="1">
+                          <a:solidFill>
+                            <a:srgbClr val="261C33"/>
+                          </a:solidFill>
+                          <a:latin typeface="Calibri"/>
+                        </a:rPr>
+                        <a:t>Random forest</a:t>
+                      </a:r>
+                    </a:p>
+                  </a:txBody>
+                  <a:tcPr marL="91440" marR="91440">
+                    <a:solidFill>
+                      <a:srgbClr val="F3EFF6"/>
+                    </a:solidFill>
+                  </a:tcPr>
+                </a:tc>
+                <a:tc>
+                  <a:txBody>
+                    <a:bodyPr/>
+                    <a:lstStyle/>
+                    <a:p>
+                      <a:r>
+                        <a:rPr sz="1400" b="0">
+                          <a:solidFill>
+                            <a:srgbClr val="261C33"/>
+                          </a:solidFill>
+                          <a:latin typeface="Calibri"/>
+                        </a:rPr>
+                        <a:t>0.830</a:t>
+                      </a:r>
+                    </a:p>
+                  </a:txBody>
+                  <a:tcPr marL="91440" marR="91440">
+                    <a:solidFill>
+                      <a:srgbClr val="F3EFF6"/>
+                    </a:solidFill>
+                  </a:tcPr>
+                </a:tc>
+                <a:tc>
+                  <a:txBody>
+                    <a:bodyPr/>
+                    <a:lstStyle/>
+                    <a:p/>
+                  </a:txBody>
+                  <a:tcPr marL="91440" marR="91440">
+                    <a:solidFill>
+                      <a:srgbClr val="F3EFF6"/>
+                    </a:solidFill>
+                  </a:tcPr>
+                </a:tc>
+                <a:tc>
+                  <a:txBody>
+                    <a:bodyPr/>
+                    <a:lstStyle/>
+                    <a:p/>
+                  </a:txBody>
+                  <a:tcPr marL="91440" marR="91440">
+                    <a:solidFill>
+                      <a:srgbClr val="F3EFF6"/>
+                    </a:solidFill>
+                  </a:tcPr>
+                </a:tc>
+                <a:tc>
+                  <a:txBody>
+                    <a:bodyPr/>
+                    <a:lstStyle/>
+                    <a:p/>
+                  </a:txBody>
+                  <a:tcPr marL="91440" marR="91440">
+                    <a:solidFill>
+                      <a:srgbClr val="F3EFF6"/>
+                    </a:solidFill>
+                  </a:tcPr>
+                </a:tc>
+                <a:tc>
+                  <a:txBody>
+                    <a:bodyPr/>
+                    <a:lstStyle/>
+                    <a:p/>
+                  </a:txBody>
+                  <a:tcPr marL="91440" marR="91440">
+                    <a:solidFill>
+                      <a:srgbClr val="F3EFF6"/>
+                    </a:solidFill>
+                  </a:tcPr>
+                </a:tc>
+              </a:tr>
+              <a:tr h="384048">
+                <a:tc>
+                  <a:txBody>
+                    <a:bodyPr/>
+                    <a:lstStyle/>
+                    <a:p>
+                      <a:r>
+                        <a:rPr sz="1400" b="1">
+                          <a:solidFill>
+                            <a:srgbClr val="261C33"/>
+                          </a:solidFill>
+                          <a:latin typeface="Calibri"/>
+                        </a:rPr>
+                        <a:t>kNN, 4 features</a:t>
+                      </a:r>
+                    </a:p>
+                  </a:txBody>
+                  <a:tcPr marL="91440" marR="91440">
+                    <a:solidFill>
+                      <a:srgbClr val="FFFFFF"/>
+                    </a:solidFill>
+                  </a:tcPr>
+                </a:tc>
+                <a:tc>
+                  <a:txBody>
+                    <a:bodyPr/>
+                    <a:lstStyle/>
+                    <a:p>
+                      <a:r>
+                        <a:rPr sz="1400" b="0">
+                          <a:solidFill>
+                            <a:srgbClr val="261C33"/>
+                          </a:solidFill>
+                          <a:latin typeface="Calibri"/>
+                        </a:rPr>
+                        <a:t>0.826</a:t>
+                      </a:r>
+                    </a:p>
+                  </a:txBody>
+                  <a:tcPr marL="91440" marR="91440">
+                    <a:solidFill>
+                      <a:srgbClr val="FFFFFF"/>
+                    </a:solidFill>
+                  </a:tcPr>
+                </a:tc>
+                <a:tc>
+                  <a:txBody>
+                    <a:bodyPr/>
+                    <a:lstStyle/>
+                    <a:p>
+                      <a:r>
+                        <a:rPr sz="1400" b="0">
+                          <a:solidFill>
+                            <a:srgbClr val="261C33"/>
+                          </a:solidFill>
+                          <a:latin typeface="Calibri"/>
+                        </a:rPr>
+                        <a:t>-0.005</a:t>
+                      </a:r>
+                    </a:p>
+                  </a:txBody>
+                  <a:tcPr marL="91440" marR="91440">
+                    <a:solidFill>
+                      <a:srgbClr val="FFFFFF"/>
+                    </a:solidFill>
+                  </a:tcPr>
+                </a:tc>
+                <a:tc>
+                  <a:txBody>
+                    <a:bodyPr/>
+                    <a:lstStyle/>
+                    <a:p>
+                      <a:r>
+                        <a:rPr sz="1400" b="0">
+                          <a:solidFill>
+                            <a:srgbClr val="261C33"/>
+                          </a:solidFill>
+                          <a:latin typeface="Calibri"/>
+                        </a:rPr>
+                        <a:t>0.014</a:t>
+                      </a:r>
+                    </a:p>
+                  </a:txBody>
+                  <a:tcPr marL="91440" marR="91440">
+                    <a:solidFill>
+                      <a:srgbClr val="FFFFFF"/>
+                    </a:solidFill>
+                  </a:tcPr>
+                </a:tc>
+                <a:tc>
+                  <a:txBody>
+                    <a:bodyPr/>
+                    <a:lstStyle/>
+                    <a:p>
+                      <a:r>
+                        <a:rPr sz="1400" b="0">
+                          <a:solidFill>
+                            <a:srgbClr val="261C33"/>
+                          </a:solidFill>
+                          <a:latin typeface="Calibri"/>
+                        </a:rPr>
+                        <a:t>0.75</a:t>
+                      </a:r>
+                    </a:p>
+                  </a:txBody>
+                  <a:tcPr marL="91440" marR="91440">
+                    <a:solidFill>
+                      <a:srgbClr val="FFFFFF"/>
+                    </a:solidFill>
+                  </a:tcPr>
+                </a:tc>
+                <a:tc>
+                  <a:txBody>
+                    <a:bodyPr/>
+                    <a:lstStyle/>
+                    <a:p>
+                      <a:r>
+                        <a:rPr sz="1400" b="0">
+                          <a:solidFill>
+                            <a:srgbClr val="261C33"/>
+                          </a:solidFill>
+                          <a:latin typeface="Calibri"/>
+                        </a:rPr>
+                        <a:t>14</a:t>
+                      </a:r>
+                    </a:p>
+                  </a:txBody>
+                  <a:tcPr marL="91440" marR="91440">
+                    <a:solidFill>
+                      <a:srgbClr val="FFFFFF"/>
+                    </a:solidFill>
+                  </a:tcPr>
+                </a:tc>
+              </a:tr>
+              <a:tr h="384048">
+                <a:tc>
+                  <a:txBody>
+                    <a:bodyPr/>
+                    <a:lstStyle/>
+                    <a:p>
+                      <a:r>
+                        <a:rPr sz="1400" b="1">
+                          <a:solidFill>
+                            <a:srgbClr val="261C33"/>
+                          </a:solidFill>
+                          <a:latin typeface="Calibri"/>
+                        </a:rPr>
+                        <a:t>Bagging</a:t>
+                      </a:r>
+                    </a:p>
+                  </a:txBody>
+                  <a:tcPr marL="91440" marR="91440">
+                    <a:solidFill>
+                      <a:srgbClr val="F3EFF6"/>
+                    </a:solidFill>
+                  </a:tcPr>
+                </a:tc>
+                <a:tc>
+                  <a:txBody>
+                    <a:bodyPr/>
+                    <a:lstStyle/>
+                    <a:p>
+                      <a:r>
+                        <a:rPr sz="1400" b="0">
+                          <a:solidFill>
+                            <a:srgbClr val="261C33"/>
+                          </a:solidFill>
+                          <a:latin typeface="Calibri"/>
+                        </a:rPr>
+                        <a:t>0.820</a:t>
+                      </a:r>
+                    </a:p>
+                  </a:txBody>
+                  <a:tcPr marL="91440" marR="91440">
+                    <a:solidFill>
+                      <a:srgbClr val="F3EFF6"/>
+                    </a:solidFill>
+                  </a:tcPr>
+                </a:tc>
+                <a:tc>
+                  <a:txBody>
+                    <a:bodyPr/>
+                    <a:lstStyle/>
+                    <a:p>
+                      <a:r>
+                        <a:rPr sz="1400" b="0">
+                          <a:solidFill>
+                            <a:srgbClr val="261C33"/>
+                          </a:solidFill>
+                          <a:latin typeface="Calibri"/>
+                        </a:rPr>
+                        <a:t>-0.011</a:t>
+                      </a:r>
+                    </a:p>
+                  </a:txBody>
+                  <a:tcPr marL="91440" marR="91440">
+                    <a:solidFill>
+                      <a:srgbClr val="F3EFF6"/>
+                    </a:solidFill>
+                  </a:tcPr>
+                </a:tc>
+                <a:tc>
+                  <a:txBody>
+                    <a:bodyPr/>
+                    <a:lstStyle/>
+                    <a:p>
+                      <a:r>
+                        <a:rPr sz="1400" b="0">
+                          <a:solidFill>
+                            <a:srgbClr val="261C33"/>
+                          </a:solidFill>
+                          <a:latin typeface="Calibri"/>
+                        </a:rPr>
+                        <a:t>0.007</a:t>
+                      </a:r>
+                    </a:p>
+                  </a:txBody>
+                  <a:tcPr marL="91440" marR="91440">
+                    <a:solidFill>
+                      <a:srgbClr val="F3EFF6"/>
+                    </a:solidFill>
+                  </a:tcPr>
+                </a:tc>
+                <a:tc>
+                  <a:txBody>
+                    <a:bodyPr/>
+                    <a:lstStyle/>
+                    <a:p>
+                      <a:r>
+                        <a:rPr sz="1400" b="0">
+                          <a:solidFill>
+                            <a:srgbClr val="261C33"/>
+                          </a:solidFill>
+                          <a:latin typeface="Calibri"/>
+                        </a:rPr>
+                        <a:t>0.15</a:t>
+                      </a:r>
+                    </a:p>
+                  </a:txBody>
+                  <a:tcPr marL="91440" marR="91440">
+                    <a:solidFill>
+                      <a:srgbClr val="F3EFF6"/>
+                    </a:solidFill>
+                  </a:tcPr>
+                </a:tc>
+                <a:tc>
+                  <a:txBody>
+                    <a:bodyPr/>
+                    <a:lstStyle/>
+                    <a:p>
+                      <a:r>
+                        <a:rPr sz="1400" b="0">
+                          <a:solidFill>
+                            <a:srgbClr val="261C33"/>
+                          </a:solidFill>
+                          <a:latin typeface="Calibri"/>
+                        </a:rPr>
+                        <a:t>18</a:t>
+                      </a:r>
+                    </a:p>
+                  </a:txBody>
+                  <a:tcPr marL="91440" marR="91440">
+                    <a:solidFill>
+                      <a:srgbClr val="F3EFF6"/>
+                    </a:solidFill>
+                  </a:tcPr>
+                </a:tc>
+              </a:tr>
+              <a:tr h="384048">
+                <a:tc>
+                  <a:txBody>
+                    <a:bodyPr/>
+                    <a:lstStyle/>
+                    <a:p>
+                      <a:r>
+                        <a:rPr sz="1400" b="1">
+                          <a:solidFill>
+                            <a:srgbClr val="261C33"/>
+                          </a:solidFill>
+                          <a:latin typeface="Calibri"/>
+                        </a:rPr>
+                        <a:t>Gradient boosting</a:t>
+                      </a:r>
+                    </a:p>
+                  </a:txBody>
+                  <a:tcPr marL="91440" marR="91440">
+                    <a:solidFill>
+                      <a:srgbClr val="FFFFFF"/>
+                    </a:solidFill>
+                  </a:tcPr>
+                </a:tc>
+                <a:tc>
+                  <a:txBody>
+                    <a:bodyPr/>
+                    <a:lstStyle/>
+                    <a:p>
+                      <a:r>
+                        <a:rPr sz="1400" b="0">
+                          <a:solidFill>
+                            <a:srgbClr val="261C33"/>
+                          </a:solidFill>
+                          <a:latin typeface="Calibri"/>
+                        </a:rPr>
+                        <a:t>0.819</a:t>
+                      </a:r>
+                    </a:p>
+                  </a:txBody>
+                  <a:tcPr marL="91440" marR="91440">
+                    <a:solidFill>
+                      <a:srgbClr val="FFFFFF"/>
+                    </a:solidFill>
+                  </a:tcPr>
+                </a:tc>
+                <a:tc>
+                  <a:txBody>
+                    <a:bodyPr/>
+                    <a:lstStyle/>
+                    <a:p>
+                      <a:r>
+                        <a:rPr sz="1400" b="0">
+                          <a:solidFill>
+                            <a:srgbClr val="261C33"/>
+                          </a:solidFill>
+                          <a:latin typeface="Calibri"/>
+                        </a:rPr>
+                        <a:t>-0.011</a:t>
+                      </a:r>
+                    </a:p>
+                  </a:txBody>
+                  <a:tcPr marL="91440" marR="91440">
+                    <a:solidFill>
+                      <a:srgbClr val="FFFFFF"/>
+                    </a:solidFill>
+                  </a:tcPr>
+                </a:tc>
+                <a:tc>
+                  <a:txBody>
+                    <a:bodyPr/>
+                    <a:lstStyle/>
+                    <a:p>
+                      <a:r>
+                        <a:rPr sz="1400" b="0">
+                          <a:solidFill>
+                            <a:srgbClr val="261C33"/>
+                          </a:solidFill>
+                          <a:latin typeface="Calibri"/>
+                        </a:rPr>
+                        <a:t>0.009</a:t>
+                      </a:r>
+                    </a:p>
+                  </a:txBody>
+                  <a:tcPr marL="91440" marR="91440">
+                    <a:solidFill>
+                      <a:srgbClr val="FFFFFF"/>
+                    </a:solidFill>
+                  </a:tcPr>
+                </a:tc>
+                <a:tc>
+                  <a:txBody>
+                    <a:bodyPr/>
+                    <a:lstStyle/>
+                    <a:p>
+                      <a:r>
+                        <a:rPr sz="1400" b="0">
+                          <a:solidFill>
+                            <a:srgbClr val="261C33"/>
+                          </a:solidFill>
+                          <a:latin typeface="Calibri"/>
+                        </a:rPr>
+                        <a:t>0.24</a:t>
+                      </a:r>
+                    </a:p>
+                  </a:txBody>
+                  <a:tcPr marL="91440" marR="91440">
+                    <a:solidFill>
+                      <a:srgbClr val="FFFFFF"/>
+                    </a:solidFill>
+                  </a:tcPr>
+                </a:tc>
+                <a:tc>
+                  <a:txBody>
+                    <a:bodyPr/>
+                    <a:lstStyle/>
+                    <a:p>
+                      <a:r>
+                        <a:rPr sz="1400" b="0">
+                          <a:solidFill>
+                            <a:srgbClr val="261C33"/>
+                          </a:solidFill>
+                          <a:latin typeface="Calibri"/>
+                        </a:rPr>
+                        <a:t>19</a:t>
+                      </a:r>
+                    </a:p>
+                  </a:txBody>
+                  <a:tcPr marL="91440" marR="91440">
+                    <a:solidFill>
+                      <a:srgbClr val="FFFFFF"/>
+                    </a:solidFill>
+                  </a:tcPr>
+                </a:tc>
+              </a:tr>
+              <a:tr h="384048">
+                <a:tc>
+                  <a:txBody>
+                    <a:bodyPr/>
+                    <a:lstStyle/>
+                    <a:p>
+                      <a:r>
+                        <a:rPr sz="1400" b="1">
+                          <a:solidFill>
+                            <a:srgbClr val="261C33"/>
+                          </a:solidFill>
+                          <a:latin typeface="Calibri"/>
+                        </a:rPr>
+                        <a:t>Logistic regression</a:t>
+                      </a:r>
+                    </a:p>
+                  </a:txBody>
+                  <a:tcPr marL="91440" marR="91440">
+                    <a:solidFill>
+                      <a:srgbClr val="F3EFF6"/>
+                    </a:solidFill>
+                  </a:tcPr>
+                </a:tc>
+                <a:tc>
+                  <a:txBody>
+                    <a:bodyPr/>
+                    <a:lstStyle/>
+                    <a:p>
+                      <a:r>
+                        <a:rPr sz="1400" b="0">
+                          <a:solidFill>
+                            <a:srgbClr val="261C33"/>
+                          </a:solidFill>
+                          <a:latin typeface="Calibri"/>
+                        </a:rPr>
+                        <a:t>0.814</a:t>
+                      </a:r>
+                    </a:p>
+                  </a:txBody>
+                  <a:tcPr marL="91440" marR="91440">
+                    <a:solidFill>
+                      <a:srgbClr val="F3EFF6"/>
+                    </a:solidFill>
+                  </a:tcPr>
+                </a:tc>
+                <a:tc>
+                  <a:txBody>
+                    <a:bodyPr/>
+                    <a:lstStyle/>
+                    <a:p>
+                      <a:r>
+                        <a:rPr sz="1400" b="0">
+                          <a:solidFill>
+                            <a:srgbClr val="261C33"/>
+                          </a:solidFill>
+                          <a:latin typeface="Calibri"/>
+                        </a:rPr>
+                        <a:t>-0.016</a:t>
+                      </a:r>
+                    </a:p>
+                  </a:txBody>
+                  <a:tcPr marL="91440" marR="91440">
+                    <a:solidFill>
+                      <a:srgbClr val="F3EFF6"/>
+                    </a:solidFill>
+                  </a:tcPr>
+                </a:tc>
+                <a:tc>
+                  <a:txBody>
+                    <a:bodyPr/>
+                    <a:lstStyle/>
+                    <a:p>
+                      <a:r>
+                        <a:rPr sz="1400" b="0">
+                          <a:solidFill>
+                            <a:srgbClr val="261C33"/>
+                          </a:solidFill>
+                          <a:latin typeface="Calibri"/>
+                        </a:rPr>
+                        <a:t>0.015</a:t>
+                      </a:r>
+                    </a:p>
+                  </a:txBody>
+                  <a:tcPr marL="91440" marR="91440">
+                    <a:solidFill>
+                      <a:srgbClr val="F3EFF6"/>
+                    </a:solidFill>
+                  </a:tcPr>
+                </a:tc>
+                <a:tc>
+                  <a:txBody>
+                    <a:bodyPr/>
+                    <a:lstStyle/>
+                    <a:p>
+                      <a:r>
+                        <a:rPr sz="1400" b="0">
+                          <a:solidFill>
+                            <a:srgbClr val="261C33"/>
+                          </a:solidFill>
+                          <a:latin typeface="Calibri"/>
+                        </a:rPr>
+                        <a:t>0.29</a:t>
+                      </a:r>
+                    </a:p>
+                  </a:txBody>
+                  <a:tcPr marL="91440" marR="91440">
+                    <a:solidFill>
+                      <a:srgbClr val="F3EFF6"/>
+                    </a:solidFill>
+                  </a:tcPr>
+                </a:tc>
+                <a:tc>
+                  <a:txBody>
+                    <a:bodyPr/>
+                    <a:lstStyle/>
+                    <a:p>
+                      <a:r>
+                        <a:rPr sz="1400" b="0">
+                          <a:solidFill>
+                            <a:srgbClr val="261C33"/>
+                          </a:solidFill>
+                          <a:latin typeface="Calibri"/>
+                        </a:rPr>
+                        <a:t>18</a:t>
+                      </a:r>
+                    </a:p>
+                  </a:txBody>
+                  <a:tcPr marL="91440" marR="91440">
+                    <a:solidFill>
+                      <a:srgbClr val="F3EFF6"/>
+                    </a:solidFill>
+                  </a:tcPr>
+                </a:tc>
+              </a:tr>
+              <a:tr h="384048">
+                <a:tc>
+                  <a:txBody>
+                    <a:bodyPr/>
+                    <a:lstStyle/>
+                    <a:p>
+                      <a:r>
+                        <a:rPr sz="1400" b="1">
+                          <a:solidFill>
+                            <a:srgbClr val="261C33"/>
+                          </a:solidFill>
+                          <a:latin typeface="Calibri"/>
+                        </a:rPr>
+                        <a:t>RBF SVM</a:t>
+                      </a:r>
+                    </a:p>
+                  </a:txBody>
+                  <a:tcPr marL="91440" marR="91440">
+                    <a:solidFill>
+                      <a:srgbClr val="FFFFFF"/>
+                    </a:solidFill>
+                  </a:tcPr>
+                </a:tc>
+                <a:tc>
+                  <a:txBody>
+                    <a:bodyPr/>
+                    <a:lstStyle/>
+                    <a:p>
+                      <a:r>
+                        <a:rPr sz="1400" b="0">
+                          <a:solidFill>
+                            <a:srgbClr val="261C33"/>
+                          </a:solidFill>
+                          <a:latin typeface="Calibri"/>
+                        </a:rPr>
+                        <a:t>0.813</a:t>
+                      </a:r>
+                    </a:p>
+                  </a:txBody>
+                  <a:tcPr marL="91440" marR="91440">
+                    <a:solidFill>
+                      <a:srgbClr val="FFFFFF"/>
+                    </a:solidFill>
+                  </a:tcPr>
+                </a:tc>
+                <a:tc>
+                  <a:txBody>
+                    <a:bodyPr/>
+                    <a:lstStyle/>
+                    <a:p>
+                      <a:r>
+                        <a:rPr sz="1400" b="0">
+                          <a:solidFill>
+                            <a:srgbClr val="261C33"/>
+                          </a:solidFill>
+                          <a:latin typeface="Calibri"/>
+                        </a:rPr>
+                        <a:t>-0.017</a:t>
+                      </a:r>
+                    </a:p>
+                  </a:txBody>
+                  <a:tcPr marL="91440" marR="91440">
+                    <a:solidFill>
+                      <a:srgbClr val="FFFFFF"/>
+                    </a:solidFill>
+                  </a:tcPr>
+                </a:tc>
+                <a:tc>
+                  <a:txBody>
+                    <a:bodyPr/>
+                    <a:lstStyle/>
+                    <a:p>
+                      <a:r>
+                        <a:rPr sz="1400" b="0">
+                          <a:solidFill>
+                            <a:srgbClr val="261C33"/>
+                          </a:solidFill>
+                          <a:latin typeface="Calibri"/>
+                        </a:rPr>
+                        <a:t>0.015</a:t>
+                      </a:r>
+                    </a:p>
+                  </a:txBody>
+                  <a:tcPr marL="91440" marR="91440">
+                    <a:solidFill>
+                      <a:srgbClr val="FFFFFF"/>
+                    </a:solidFill>
+                  </a:tcPr>
+                </a:tc>
+                <a:tc>
+                  <a:txBody>
+                    <a:bodyPr/>
+                    <a:lstStyle/>
+                    <a:p>
+                      <a:r>
+                        <a:rPr sz="1400" b="0">
+                          <a:solidFill>
+                            <a:srgbClr val="261C33"/>
+                          </a:solidFill>
+                          <a:latin typeface="Calibri"/>
+                        </a:rPr>
+                        <a:t>0.28</a:t>
+                      </a:r>
+                    </a:p>
+                  </a:txBody>
+                  <a:tcPr marL="91440" marR="91440">
+                    <a:solidFill>
+                      <a:srgbClr val="FFFFFF"/>
+                    </a:solidFill>
+                  </a:tcPr>
+                </a:tc>
+                <a:tc>
+                  <a:txBody>
+                    <a:bodyPr/>
+                    <a:lstStyle/>
+                    <a:p>
+                      <a:r>
+                        <a:rPr sz="1400" b="0">
+                          <a:solidFill>
+                            <a:srgbClr val="261C33"/>
+                          </a:solidFill>
+                          <a:latin typeface="Calibri"/>
+                        </a:rPr>
+                        <a:t>17</a:t>
+                      </a:r>
+                    </a:p>
+                  </a:txBody>
+                  <a:tcPr marL="91440" marR="91440">
+                    <a:solidFill>
+                      <a:srgbClr val="FFFFFF"/>
+                    </a:solidFill>
+                  </a:tcPr>
+                </a:tc>
+              </a:tr>
+              <a:tr h="384048">
+                <a:tc>
+                  <a:txBody>
+                    <a:bodyPr/>
+                    <a:lstStyle/>
+                    <a:p>
+                      <a:r>
+                        <a:rPr sz="1400" b="1">
+                          <a:solidFill>
+                            <a:srgbClr val="261C33"/>
+                          </a:solidFill>
+                          <a:latin typeface="Calibri"/>
+                        </a:rPr>
+                        <a:t>LDA</a:t>
+                      </a:r>
+                    </a:p>
+                  </a:txBody>
+                  <a:tcPr marL="91440" marR="91440">
+                    <a:solidFill>
+                      <a:srgbClr val="F3EFF6"/>
+                    </a:solidFill>
+                  </a:tcPr>
+                </a:tc>
+                <a:tc>
+                  <a:txBody>
+                    <a:bodyPr/>
+                    <a:lstStyle/>
+                    <a:p>
+                      <a:r>
+                        <a:rPr sz="1400" b="0">
+                          <a:solidFill>
+                            <a:srgbClr val="261C33"/>
+                          </a:solidFill>
+                          <a:latin typeface="Calibri"/>
+                        </a:rPr>
+                        <a:t>0.799</a:t>
+                      </a:r>
+                    </a:p>
+                  </a:txBody>
+                  <a:tcPr marL="91440" marR="91440">
+                    <a:solidFill>
+                      <a:srgbClr val="F3EFF6"/>
+                    </a:solidFill>
+                  </a:tcPr>
+                </a:tc>
+                <a:tc>
+                  <a:txBody>
+                    <a:bodyPr/>
+                    <a:lstStyle/>
+                    <a:p>
+                      <a:r>
+                        <a:rPr sz="1400" b="0">
+                          <a:solidFill>
+                            <a:srgbClr val="261C33"/>
+                          </a:solidFill>
+                          <a:latin typeface="Calibri"/>
+                        </a:rPr>
+                        <a:t>-0.031</a:t>
+                      </a:r>
+                    </a:p>
+                  </a:txBody>
+                  <a:tcPr marL="91440" marR="91440">
+                    <a:solidFill>
+                      <a:srgbClr val="F3EFF6"/>
+                    </a:solidFill>
+                  </a:tcPr>
+                </a:tc>
+                <a:tc>
+                  <a:txBody>
+                    <a:bodyPr/>
+                    <a:lstStyle/>
+                    <a:p>
+                      <a:r>
+                        <a:rPr sz="1400" b="0">
+                          <a:solidFill>
+                            <a:srgbClr val="261C33"/>
+                          </a:solidFill>
+                          <a:latin typeface="Calibri"/>
+                        </a:rPr>
+                        <a:t>0.014</a:t>
+                      </a:r>
+                    </a:p>
+                  </a:txBody>
+                  <a:tcPr marL="91440" marR="91440">
+                    <a:solidFill>
+                      <a:srgbClr val="F3EFF6"/>
+                    </a:solidFill>
+                  </a:tcPr>
+                </a:tc>
+                <a:tc>
+                  <a:txBody>
+                    <a:bodyPr/>
+                    <a:lstStyle/>
+                    <a:p>
+                      <a:r>
+                        <a:rPr sz="1400" b="0">
+                          <a:solidFill>
+                            <a:srgbClr val="261C33"/>
+                          </a:solidFill>
+                          <a:latin typeface="Calibri"/>
+                        </a:rPr>
+                        <a:t>0.04</a:t>
+                      </a:r>
+                    </a:p>
+                  </a:txBody>
+                  <a:tcPr marL="91440" marR="91440">
+                    <a:solidFill>
+                      <a:srgbClr val="F3EFF6"/>
+                    </a:solidFill>
+                  </a:tcPr>
+                </a:tc>
+                <a:tc>
+                  <a:txBody>
+                    <a:bodyPr/>
+                    <a:lstStyle/>
+                    <a:p>
+                      <a:r>
+                        <a:rPr sz="1400" b="0">
+                          <a:solidFill>
+                            <a:srgbClr val="261C33"/>
+                          </a:solidFill>
+                          <a:latin typeface="Calibri"/>
+                        </a:rPr>
+                        <a:t>19</a:t>
+                      </a:r>
+                    </a:p>
+                  </a:txBody>
+                  <a:tcPr marL="91440" marR="91440">
+                    <a:solidFill>
+                      <a:srgbClr val="F3EFF6"/>
+                    </a:solidFill>
+                  </a:tcPr>
+                </a:tc>
+              </a:tr>
+              <a:tr h="384048">
+                <a:tc>
+                  <a:txBody>
+                    <a:bodyPr/>
+                    <a:lstStyle/>
+                    <a:p>
+                      <a:r>
+                        <a:rPr sz="1400" b="1">
+                          <a:solidFill>
+                            <a:srgbClr val="261C33"/>
+                          </a:solidFill>
+                          <a:latin typeface="Calibri"/>
+                        </a:rPr>
+                        <a:t>kNN</a:t>
+                      </a:r>
+                    </a:p>
+                  </a:txBody>
+                  <a:tcPr marL="91440" marR="91440">
+                    <a:solidFill>
+                      <a:srgbClr val="FFFFFF"/>
+                    </a:solidFill>
+                  </a:tcPr>
+                </a:tc>
+                <a:tc>
+                  <a:txBody>
+                    <a:bodyPr/>
+                    <a:lstStyle/>
+                    <a:p>
+                      <a:r>
+                        <a:rPr sz="1400" b="0">
+                          <a:solidFill>
+                            <a:srgbClr val="261C33"/>
+                          </a:solidFill>
+                          <a:latin typeface="Calibri"/>
+                        </a:rPr>
+                        <a:t>0.795</a:t>
+                      </a:r>
+                    </a:p>
+                  </a:txBody>
+                  <a:tcPr marL="91440" marR="91440">
+                    <a:solidFill>
+                      <a:srgbClr val="FFFFFF"/>
+                    </a:solidFill>
+                  </a:tcPr>
+                </a:tc>
+                <a:tc>
+                  <a:txBody>
+                    <a:bodyPr/>
+                    <a:lstStyle/>
+                    <a:p>
+                      <a:r>
+                        <a:rPr sz="1400" b="0">
+                          <a:solidFill>
+                            <a:srgbClr val="261C33"/>
+                          </a:solidFill>
+                          <a:latin typeface="Calibri"/>
+                        </a:rPr>
+                        <a:t>-0.035</a:t>
+                      </a:r>
+                    </a:p>
+                  </a:txBody>
+                  <a:tcPr marL="91440" marR="91440">
+                    <a:solidFill>
+                      <a:srgbClr val="FFFFFF"/>
+                    </a:solidFill>
+                  </a:tcPr>
+                </a:tc>
+                <a:tc>
+                  <a:txBody>
+                    <a:bodyPr/>
+                    <a:lstStyle/>
+                    <a:p>
+                      <a:r>
+                        <a:rPr sz="1400" b="0">
+                          <a:solidFill>
+                            <a:srgbClr val="261C33"/>
+                          </a:solidFill>
+                          <a:latin typeface="Calibri"/>
+                        </a:rPr>
+                        <a:t>0.014</a:t>
+                      </a:r>
+                    </a:p>
+                  </a:txBody>
+                  <a:tcPr marL="91440" marR="91440">
+                    <a:solidFill>
+                      <a:srgbClr val="FFFFFF"/>
+                    </a:solidFill>
+                  </a:tcPr>
+                </a:tc>
+                <a:tc>
+                  <a:txBody>
+                    <a:bodyPr/>
+                    <a:lstStyle/>
+                    <a:p>
+                      <a:r>
+                        <a:rPr sz="1400" b="0">
+                          <a:solidFill>
+                            <a:srgbClr val="261C33"/>
+                          </a:solidFill>
+                          <a:latin typeface="Calibri"/>
+                        </a:rPr>
+                        <a:t>0.02</a:t>
+                      </a:r>
+                    </a:p>
+                  </a:txBody>
+                  <a:tcPr marL="91440" marR="91440">
+                    <a:solidFill>
+                      <a:srgbClr val="FFFFFF"/>
+                    </a:solidFill>
+                  </a:tcPr>
+                </a:tc>
+                <a:tc>
+                  <a:txBody>
+                    <a:bodyPr/>
+                    <a:lstStyle/>
+                    <a:p>
+                      <a:r>
+                        <a:rPr sz="1400" b="0">
+                          <a:solidFill>
+                            <a:srgbClr val="261C33"/>
+                          </a:solidFill>
+                          <a:latin typeface="Calibri"/>
+                        </a:rPr>
+                        <a:t>22</a:t>
+                      </a:r>
+                    </a:p>
+                  </a:txBody>
+                  <a:tcPr marL="91440" marR="91440">
+                    <a:solidFill>
+                      <a:srgbClr val="FFFFFF"/>
+                    </a:solidFill>
+                  </a:tcPr>
+                </a:tc>
+              </a:tr>
+              <a:tr h="384048">
+                <a:tc>
+                  <a:txBody>
+                    <a:bodyPr/>
+                    <a:lstStyle/>
+                    <a:p>
+                      <a:r>
+                        <a:rPr sz="1400" b="1">
+                          <a:solidFill>
+                            <a:srgbClr val="261C33"/>
+                          </a:solidFill>
+                          <a:latin typeface="Calibri"/>
+                        </a:rPr>
+                        <a:t>Decision tree</a:t>
+                      </a:r>
+                    </a:p>
+                  </a:txBody>
+                  <a:tcPr marL="91440" marR="91440">
+                    <a:solidFill>
+                      <a:srgbClr val="F3EFF6"/>
+                    </a:solidFill>
+                  </a:tcPr>
+                </a:tc>
+                <a:tc>
+                  <a:txBody>
+                    <a:bodyPr/>
+                    <a:lstStyle/>
+                    <a:p>
+                      <a:r>
+                        <a:rPr sz="1400" b="0">
+                          <a:solidFill>
+                            <a:srgbClr val="261C33"/>
+                          </a:solidFill>
+                          <a:latin typeface="Calibri"/>
+                        </a:rPr>
+                        <a:t>0.790</a:t>
+                      </a:r>
+                    </a:p>
+                  </a:txBody>
+                  <a:tcPr marL="91440" marR="91440">
+                    <a:solidFill>
+                      <a:srgbClr val="F3EFF6"/>
+                    </a:solidFill>
+                  </a:tcPr>
+                </a:tc>
+                <a:tc>
+                  <a:txBody>
+                    <a:bodyPr/>
+                    <a:lstStyle/>
+                    <a:p>
+                      <a:r>
+                        <a:rPr sz="1400" b="0">
+                          <a:solidFill>
+                            <a:srgbClr val="261C33"/>
+                          </a:solidFill>
+                          <a:latin typeface="Calibri"/>
+                        </a:rPr>
+                        <a:t>-0.041</a:t>
+                      </a:r>
+                    </a:p>
+                  </a:txBody>
+                  <a:tcPr marL="91440" marR="91440">
+                    <a:solidFill>
+                      <a:srgbClr val="F3EFF6"/>
+                    </a:solidFill>
+                  </a:tcPr>
+                </a:tc>
+                <a:tc>
+                  <a:txBody>
+                    <a:bodyPr/>
+                    <a:lstStyle/>
+                    <a:p>
+                      <a:r>
+                        <a:rPr sz="1400" b="0">
+                          <a:solidFill>
+                            <a:srgbClr val="261C33"/>
+                          </a:solidFill>
+                          <a:latin typeface="Calibri"/>
+                        </a:rPr>
+                        <a:t>0.017</a:t>
+                      </a:r>
+                    </a:p>
+                  </a:txBody>
+                  <a:tcPr marL="91440" marR="91440">
+                    <a:solidFill>
+                      <a:srgbClr val="F3EFF6"/>
+                    </a:solidFill>
+                  </a:tcPr>
+                </a:tc>
+                <a:tc>
+                  <a:txBody>
+                    <a:bodyPr/>
+                    <a:lstStyle/>
+                    <a:p>
+                      <a:r>
+                        <a:rPr sz="1400" b="0">
+                          <a:solidFill>
+                            <a:srgbClr val="261C33"/>
+                          </a:solidFill>
+                          <a:latin typeface="Calibri"/>
+                        </a:rPr>
+                        <a:t>0.03</a:t>
+                      </a:r>
+                    </a:p>
+                  </a:txBody>
+                  <a:tcPr marL="91440" marR="91440">
+                    <a:solidFill>
+                      <a:srgbClr val="F3EFF6"/>
+                    </a:solidFill>
+                  </a:tcPr>
+                </a:tc>
+                <a:tc>
+                  <a:txBody>
+                    <a:bodyPr/>
+                    <a:lstStyle/>
+                    <a:p>
+                      <a:r>
+                        <a:rPr sz="1400" b="0">
+                          <a:solidFill>
+                            <a:srgbClr val="261C33"/>
+                          </a:solidFill>
+                          <a:latin typeface="Calibri"/>
+                        </a:rPr>
+                        <a:t>22</a:t>
+                      </a:r>
+                    </a:p>
+                  </a:txBody>
+                  <a:tcPr marL="91440" marR="91440">
+                    <a:solidFill>
+                      <a:srgbClr val="F3EFF6"/>
+                    </a:solidFill>
+                  </a:tcPr>
+                </a:tc>
+              </a:tr>
+              <a:tr h="384048">
+                <a:tc>
+                  <a:txBody>
+                    <a:bodyPr/>
+                    <a:lstStyle/>
+                    <a:p>
+                      <a:r>
+                        <a:rPr sz="1400" b="1">
+                          <a:solidFill>
+                            <a:srgbClr val="261C33"/>
+                          </a:solidFill>
+                          <a:latin typeface="Calibri"/>
+                        </a:rPr>
+                        <a:t>QDA</a:t>
+                      </a:r>
+                    </a:p>
+                  </a:txBody>
+                  <a:tcPr marL="91440" marR="91440">
+                    <a:solidFill>
+                      <a:srgbClr val="FFFFFF"/>
+                    </a:solidFill>
+                  </a:tcPr>
+                </a:tc>
+                <a:tc>
+                  <a:txBody>
+                    <a:bodyPr/>
+                    <a:lstStyle/>
+                    <a:p>
+                      <a:r>
+                        <a:rPr sz="1400" b="0">
+                          <a:solidFill>
+                            <a:srgbClr val="261C33"/>
+                          </a:solidFill>
+                          <a:latin typeface="Calibri"/>
+                        </a:rPr>
+                        <a:t>0.783</a:t>
+                      </a:r>
+                    </a:p>
+                  </a:txBody>
+                  <a:tcPr marL="91440" marR="91440">
+                    <a:solidFill>
+                      <a:srgbClr val="FFFFFF"/>
+                    </a:solidFill>
+                  </a:tcPr>
+                </a:tc>
+                <a:tc>
+                  <a:txBody>
+                    <a:bodyPr/>
+                    <a:lstStyle/>
+                    <a:p>
+                      <a:r>
+                        <a:rPr sz="1400" b="0">
+                          <a:solidFill>
+                            <a:srgbClr val="261C33"/>
+                          </a:solidFill>
+                          <a:latin typeface="Calibri"/>
+                        </a:rPr>
+                        <a:t>-0.047</a:t>
+                      </a:r>
+                    </a:p>
+                  </a:txBody>
+                  <a:tcPr marL="91440" marR="91440">
+                    <a:solidFill>
+                      <a:srgbClr val="FFFFFF"/>
+                    </a:solidFill>
+                  </a:tcPr>
+                </a:tc>
+                <a:tc>
+                  <a:txBody>
+                    <a:bodyPr/>
+                    <a:lstStyle/>
+                    <a:p>
+                      <a:r>
+                        <a:rPr sz="1400" b="0">
+                          <a:solidFill>
+                            <a:srgbClr val="261C33"/>
+                          </a:solidFill>
+                          <a:latin typeface="Calibri"/>
+                        </a:rPr>
+                        <a:t>0.020</a:t>
+                      </a:r>
+                    </a:p>
+                  </a:txBody>
+                  <a:tcPr marL="91440" marR="91440">
+                    <a:solidFill>
+                      <a:srgbClr val="FFFFFF"/>
+                    </a:solidFill>
+                  </a:tcPr>
+                </a:tc>
+                <a:tc>
+                  <a:txBody>
+                    <a:bodyPr/>
+                    <a:lstStyle/>
+                    <a:p>
+                      <a:r>
+                        <a:rPr sz="1400" b="0">
+                          <a:solidFill>
+                            <a:srgbClr val="261C33"/>
+                          </a:solidFill>
+                          <a:latin typeface="Calibri"/>
+                        </a:rPr>
+                        <a:t>0.02</a:t>
+                      </a:r>
+                    </a:p>
+                  </a:txBody>
+                  <a:tcPr marL="91440" marR="91440">
+                    <a:solidFill>
+                      <a:srgbClr val="FFFFFF"/>
+                    </a:solidFill>
+                  </a:tcPr>
+                </a:tc>
+                <a:tc>
+                  <a:txBody>
+                    <a:bodyPr/>
+                    <a:lstStyle/>
+                    <a:p>
+                      <a:r>
+                        <a:rPr sz="1400" b="0">
+                          <a:solidFill>
+                            <a:srgbClr val="261C33"/>
+                          </a:solidFill>
+                          <a:latin typeface="Calibri"/>
+                        </a:rPr>
+                        <a:t>22</a:t>
+                      </a:r>
+                    </a:p>
+                  </a:txBody>
+                  <a:tcPr marL="91440" marR="91440">
+                    <a:solidFill>
+                      <a:srgbClr val="FFFFFF"/>
+                    </a:solidFill>
+                  </a:tcPr>
+                </a:tc>
+              </a:tr>
+            </a:tbl>
+          </a:graphicData>
+        </a:graphic>
+      </p:graphicFrame>
+    </p:spTree>
+  </p:cSld>
+  <p:clrMapOvr>
+    <a:masterClrMapping/>
+  </p:clrMapOvr>
+</p:sld>
+</file>
+
+<file path=ppt/slides/slide11.xml><?xml version="1.0" encoding="utf-8"?>
+<p:sld xmlns:a="http://schemas.openxmlformats.org/drawingml/2006/main" xmlns:p="http://schemas.openxmlformats.org/presentationml/2006/main" xmlns:r="http://schemas.openxmlformats.org/officeDocument/2006/relationships">
+  <p:cSld>
+    <p:bg>
+      <p:bgPr>
+        <a:solidFill>
+          <a:srgbClr val="FFFFFF"/>
+        </a:solidFill>
+        <a:effectLst/>
+      </p:bgPr>
+    </p:bg>
+    <p:spTree>
+      <p:nvGrpSpPr>
+        <p:cNvPr id="1" name=""/>
+        <p:cNvGrpSpPr/>
+        <p:nvPr/>
+      </p:nvGrpSpPr>
+      <p:grpSpPr/>
+      <p:sp>
+        <p:nvSpPr>
+          <p:cNvPr id="2" name="TextBox 1"/>
+          <p:cNvSpPr txBox="1"/>
+          <p:nvPr/>
+        </p:nvSpPr>
+        <p:spPr>
+          <a:xfrm>
+            <a:off x="548640" y="411480"/>
+            <a:ext cx="11094415" cy="822960"/>
+          </a:xfrm>
+          <a:prstGeom prst="rect">
+            <a:avLst/>
+          </a:prstGeom>
+          <a:noFill/>
+        </p:spPr>
+        <p:txBody>
+          <a:bodyPr wrap="square" lIns="0" rIns="0" anchor="t">
+            <a:spAutoFit/>
+          </a:bodyPr>
+          <a:lstStyle/>
+          <a:p>
+            <a:r>
+              <a:rPr sz="3200" b="1">
+                <a:solidFill>
+                  <a:srgbClr val="261C33"/>
+                </a:solidFill>
+                <a:latin typeface="Cambria"/>
+              </a:rPr>
+              <a:t>(3) The decision rule under its neighbours</a:t>
+            </a:r>
+          </a:p>
+        </p:txBody>
+      </p:sp>
+      <p:graphicFrame>
+        <p:nvGraphicFramePr>
+          <p:cNvPr id="3" name="Table 2"/>
+          <p:cNvGraphicFramePr>
+            <a:graphicFrameLocks noGrp="1"/>
+          </p:cNvGraphicFramePr>
+          <p:nvPr/>
+        </p:nvGraphicFramePr>
+        <p:xfrm>
+          <a:off x="548640" y="1371600"/>
+          <a:ext cx="11094413" cy="2304288"/>
+        </p:xfrm>
+        <a:graphic>
+          <a:graphicData uri="http://schemas.openxmlformats.org/drawingml/2006/table">
+            <a:tbl>
+              <a:tblPr firstRow="1" bandRow="1">
+                <a:tableStyleId>{5C22544A-7EE6-4342-B048-85BDC9FD1C3A}</a:tableStyleId>
+              </a:tblPr>
+              <a:tblGrid>
+                <a:gridCol w="5601063"/>
+                <a:gridCol w="3446808"/>
+                <a:gridCol w="2046542"/>
+              </a:tblGrid>
+              <a:tr h="384048">
+                <a:tc>
+                  <a:txBody>
+                    <a:bodyPr/>
+                    <a:lstStyle/>
+                    <a:p>
+                      <a:r>
+                        <a:rPr sz="1400" b="1">
+                          <a:solidFill>
+                            <a:srgbClr val="FFFFFF"/>
+                          </a:solidFill>
+                          <a:latin typeface="Calibri"/>
+                        </a:rPr>
+                        <a:t>rule</a:t>
+                      </a:r>
+                    </a:p>
+                  </a:txBody>
+                  <a:tcPr marL="91440" marR="91440">
+                    <a:solidFill>
+                      <a:srgbClr val="261C33"/>
+                    </a:solidFill>
+                  </a:tcPr>
+                </a:tc>
+                <a:tc>
+                  <a:txBody>
+                    <a:bodyPr/>
+                    <a:lstStyle/>
+                    <a:p>
+                      <a:r>
+                        <a:rPr sz="1400" b="1">
+                          <a:solidFill>
+                            <a:srgbClr val="FFFFFF"/>
+                          </a:solidFill>
+                          <a:latin typeface="Calibri"/>
+                        </a:rPr>
+                        <a:t>qualifying</a:t>
+                      </a:r>
+                    </a:p>
+                  </a:txBody>
+                  <a:tcPr marL="91440" marR="91440">
+                    <a:solidFill>
+                      <a:srgbClr val="261C33"/>
+                    </a:solidFill>
+                  </a:tcPr>
+                </a:tc>
+                <a:tc>
+                  <a:txBody>
+                    <a:bodyPr/>
+                    <a:lstStyle/>
+                    <a:p>
+                      <a:r>
+                        <a:rPr sz="1400" b="1">
+                          <a:solidFill>
+                            <a:srgbClr val="FFFFFF"/>
+                          </a:solidFill>
+                          <a:latin typeface="Calibri"/>
+                        </a:rPr>
+                        <a:t>chosen</a:t>
+                      </a:r>
+                    </a:p>
+                  </a:txBody>
+                  <a:tcPr marL="91440" marR="91440">
+                    <a:solidFill>
+                      <a:srgbClr val="261C33"/>
+                    </a:solidFill>
+                  </a:tcPr>
+                </a:tc>
+              </a:tr>
+              <a:tr h="384048">
+                <a:tc>
+                  <a:txBody>
+                    <a:bodyPr/>
+                    <a:lstStyle/>
+                    <a:p>
+                      <a:r>
+                        <a:rPr sz="1400" b="1">
+                          <a:solidFill>
+                            <a:srgbClr val="261C33"/>
+                          </a:solidFill>
+                          <a:latin typeface="Calibri"/>
+                        </a:rPr>
+                        <a:t>within 1 corrected error of the best (written first)</a:t>
+                      </a:r>
+                    </a:p>
+                  </a:txBody>
+                  <a:tcPr marL="91440" marR="91440">
+                    <a:solidFill>
+                      <a:srgbClr val="F3EFF6"/>
+                    </a:solidFill>
+                  </a:tcPr>
+                </a:tc>
+                <a:tc>
+                  <a:txBody>
+                    <a:bodyPr/>
+                    <a:lstStyle/>
+                    <a:p>
+                      <a:r>
+                        <a:rPr sz="1400" b="0">
+                          <a:solidFill>
+                            <a:srgbClr val="261C33"/>
+                          </a:solidFill>
+                          <a:latin typeface="Calibri"/>
+                        </a:rPr>
+                        <a:t>kNN on 4 features, random forest</a:t>
+                      </a:r>
+                    </a:p>
+                  </a:txBody>
+                  <a:tcPr marL="91440" marR="91440">
+                    <a:solidFill>
+                      <a:srgbClr val="F3EFF6"/>
+                    </a:solidFill>
+                  </a:tcPr>
+                </a:tc>
+                <a:tc>
+                  <a:txBody>
+                    <a:bodyPr/>
+                    <a:lstStyle/>
+                    <a:p>
+                      <a:r>
+                        <a:rPr sz="1400" b="0">
+                          <a:solidFill>
+                            <a:srgbClr val="261C33"/>
+                          </a:solidFill>
+                          <a:latin typeface="Calibri"/>
+                        </a:rPr>
+                        <a:t>kNN on 4 features</a:t>
+                      </a:r>
+                    </a:p>
+                  </a:txBody>
+                  <a:tcPr marL="91440" marR="91440">
+                    <a:solidFill>
+                      <a:srgbClr val="F3EFF6"/>
+                    </a:solidFill>
+                  </a:tcPr>
+                </a:tc>
+              </a:tr>
+              <a:tr h="384048">
+                <a:tc>
+                  <a:txBody>
+                    <a:bodyPr/>
+                    <a:lstStyle/>
+                    <a:p>
+                      <a:r>
+                        <a:rPr sz="1400" b="1">
+                          <a:solidFill>
+                            <a:srgbClr val="261C33"/>
+                          </a:solidFill>
+                          <a:latin typeface="Calibri"/>
+                        </a:rPr>
+                        <a:t>within the rope, gap under one point</a:t>
+                      </a:r>
+                    </a:p>
+                  </a:txBody>
+                  <a:tcPr marL="91440" marR="91440">
+                    <a:solidFill>
+                      <a:srgbClr val="FFFFFF"/>
+                    </a:solidFill>
+                  </a:tcPr>
+                </a:tc>
+                <a:tc>
+                  <a:txBody>
+                    <a:bodyPr/>
+                    <a:lstStyle/>
+                    <a:p>
+                      <a:r>
+                        <a:rPr sz="1400" b="0">
+                          <a:solidFill>
+                            <a:srgbClr val="261C33"/>
+                          </a:solidFill>
+                          <a:latin typeface="Calibri"/>
+                        </a:rPr>
+                        <a:t>kNN on 4 features, random forest</a:t>
+                      </a:r>
+                    </a:p>
+                  </a:txBody>
+                  <a:tcPr marL="91440" marR="91440">
+                    <a:solidFill>
+                      <a:srgbClr val="FFFFFF"/>
+                    </a:solidFill>
+                  </a:tcPr>
+                </a:tc>
+                <a:tc>
+                  <a:txBody>
+                    <a:bodyPr/>
+                    <a:lstStyle/>
+                    <a:p>
+                      <a:r>
+                        <a:rPr sz="1400" b="0">
+                          <a:solidFill>
+                            <a:srgbClr val="261C33"/>
+                          </a:solidFill>
+                          <a:latin typeface="Calibri"/>
+                        </a:rPr>
+                        <a:t>kNN on 4 features</a:t>
+                      </a:r>
+                    </a:p>
+                  </a:txBody>
+                  <a:tcPr marL="91440" marR="91440">
+                    <a:solidFill>
+                      <a:srgbClr val="FFFFFF"/>
+                    </a:solidFill>
+                  </a:tcPr>
+                </a:tc>
+              </a:tr>
+              <a:tr h="384048">
+                <a:tc>
+                  <a:txBody>
+                    <a:bodyPr/>
+                    <a:lstStyle/>
+                    <a:p>
+                      <a:r>
+                        <a:rPr sz="1400" b="1">
+                          <a:solidFill>
+                            <a:srgbClr val="261C33"/>
+                          </a:solidFill>
+                          <a:latin typeface="Calibri"/>
+                        </a:rPr>
+                        <a:t>within 2 corrected errors</a:t>
+                      </a:r>
+                    </a:p>
+                  </a:txBody>
+                  <a:tcPr marL="91440" marR="91440">
+                    <a:solidFill>
+                      <a:srgbClr val="F3EFF6"/>
+                    </a:solidFill>
+                  </a:tcPr>
+                </a:tc>
+                <a:tc>
+                  <a:txBody>
+                    <a:bodyPr/>
+                    <a:lstStyle/>
+                    <a:p>
+                      <a:r>
+                        <a:rPr sz="1400" b="0">
+                          <a:solidFill>
+                            <a:srgbClr val="261C33"/>
+                          </a:solidFill>
+                          <a:latin typeface="Calibri"/>
+                        </a:rPr>
+                        <a:t>8 methods</a:t>
+                      </a:r>
+                    </a:p>
+                  </a:txBody>
+                  <a:tcPr marL="91440" marR="91440">
+                    <a:solidFill>
+                      <a:srgbClr val="F3EFF6"/>
+                    </a:solidFill>
+                  </a:tcPr>
+                </a:tc>
+                <a:tc>
+                  <a:txBody>
+                    <a:bodyPr/>
+                    <a:lstStyle/>
+                    <a:p>
+                      <a:r>
+                        <a:rPr sz="1400" b="0">
+                          <a:solidFill>
+                            <a:srgbClr val="261C33"/>
+                          </a:solidFill>
+                          <a:latin typeface="Calibri"/>
+                        </a:rPr>
+                        <a:t>logistic regression</a:t>
+                      </a:r>
+                    </a:p>
+                  </a:txBody>
+                  <a:tcPr marL="91440" marR="91440">
+                    <a:solidFill>
+                      <a:srgbClr val="F3EFF6"/>
+                    </a:solidFill>
+                  </a:tcPr>
+                </a:tc>
+              </a:tr>
+              <a:tr h="384048">
+                <a:tc>
+                  <a:txBody>
+                    <a:bodyPr/>
+                    <a:lstStyle/>
+                    <a:p>
+                      <a:r>
+                        <a:rPr sz="1400" b="1">
+                          <a:solidFill>
+                            <a:srgbClr val="261C33"/>
+                          </a:solidFill>
+                          <a:latin typeface="Calibri"/>
+                        </a:rPr>
+                        <a:t>t-test not significant at 5%</a:t>
+                      </a:r>
+                    </a:p>
+                  </a:txBody>
+                  <a:tcPr marL="91440" marR="91440">
+                    <a:solidFill>
+                      <a:srgbClr val="FFFFFF"/>
+                    </a:solidFill>
+                  </a:tcPr>
+                </a:tc>
+                <a:tc>
+                  <a:txBody>
+                    <a:bodyPr/>
+                    <a:lstStyle/>
+                    <a:p>
+                      <a:r>
+                        <a:rPr sz="1400" b="0">
+                          <a:solidFill>
+                            <a:srgbClr val="261C33"/>
+                          </a:solidFill>
+                          <a:latin typeface="Calibri"/>
+                        </a:rPr>
+                        <a:t>the same 8</a:t>
+                      </a:r>
+                    </a:p>
+                  </a:txBody>
+                  <a:tcPr marL="91440" marR="91440">
+                    <a:solidFill>
+                      <a:srgbClr val="FFFFFF"/>
+                    </a:solidFill>
+                  </a:tcPr>
+                </a:tc>
+                <a:tc>
+                  <a:txBody>
+                    <a:bodyPr/>
+                    <a:lstStyle/>
+                    <a:p>
+                      <a:r>
+                        <a:rPr sz="1400" b="0">
+                          <a:solidFill>
+                            <a:srgbClr val="261C33"/>
+                          </a:solidFill>
+                          <a:latin typeface="Calibri"/>
+                        </a:rPr>
+                        <a:t>logistic regression</a:t>
+                      </a:r>
+                    </a:p>
+                  </a:txBody>
+                  <a:tcPr marL="91440" marR="91440">
+                    <a:solidFill>
+                      <a:srgbClr val="FFFFFF"/>
+                    </a:solidFill>
+                  </a:tcPr>
+                </a:tc>
+              </a:tr>
+              <a:tr h="384048">
+                <a:tc>
+                  <a:txBody>
+                    <a:bodyPr/>
+                    <a:lstStyle/>
+                    <a:p>
+                      <a:r>
+                        <a:rPr sz="1400" b="1">
+                          <a:solidFill>
+                            <a:srgbClr val="261C33"/>
+                          </a:solidFill>
+                          <a:latin typeface="Calibri"/>
+                        </a:rPr>
+                        <a:t>best mean, no band</a:t>
+                      </a:r>
+                    </a:p>
+                  </a:txBody>
+                  <a:tcPr marL="91440" marR="91440">
+                    <a:solidFill>
+                      <a:srgbClr val="F3EFF6"/>
+                    </a:solidFill>
+                  </a:tcPr>
+                </a:tc>
+                <a:tc>
+                  <a:txBody>
+                    <a:bodyPr/>
+                    <a:lstStyle/>
+                    <a:p>
+                      <a:r>
+                        <a:rPr sz="1400" b="0">
+                          <a:solidFill>
+                            <a:srgbClr val="261C33"/>
+                          </a:solidFill>
+                          <a:latin typeface="Calibri"/>
+                        </a:rPr>
+                        <a:t>random forest</a:t>
+                      </a:r>
+                    </a:p>
+                  </a:txBody>
+                  <a:tcPr marL="91440" marR="91440">
+                    <a:solidFill>
+                      <a:srgbClr val="F3EFF6"/>
+                    </a:solidFill>
+                  </a:tcPr>
+                </a:tc>
+                <a:tc>
+                  <a:txBody>
+                    <a:bodyPr/>
+                    <a:lstStyle/>
+                    <a:p>
+                      <a:r>
+                        <a:rPr sz="1400" b="0">
+                          <a:solidFill>
+                            <a:srgbClr val="261C33"/>
+                          </a:solidFill>
+                          <a:latin typeface="Calibri"/>
+                        </a:rPr>
+                        <a:t>random forest</a:t>
+                      </a:r>
+                    </a:p>
+                  </a:txBody>
+                  <a:tcPr marL="91440" marR="91440">
+                    <a:solidFill>
+                      <a:srgbClr val="F3EFF6"/>
+                    </a:solidFill>
+                  </a:tcPr>
+                </a:tc>
+              </a:tr>
+            </a:tbl>
+          </a:graphicData>
+        </a:graphic>
+      </p:graphicFrame>
+    </p:spTree>
+  </p:cSld>
+  <p:clrMapOvr>
+    <a:masterClrMapping/>
+  </p:clrMapOvr>
+</p:sld>
+</file>
+
+<file path=ppt/slides/slide12.xml><?xml version="1.0" encoding="utf-8"?>
+<p:sld xmlns:a="http://schemas.openxmlformats.org/drawingml/2006/main" xmlns:p="http://schemas.openxmlformats.org/presentationml/2006/main" xmlns:r="http://schemas.openxmlformats.org/officeDocument/2006/relationships">
+  <p:cSld>
+    <p:bg>
+      <p:bgPr>
+        <a:solidFill>
+          <a:srgbClr val="FFFFFF"/>
+        </a:solidFill>
+        <a:effectLst/>
+      </p:bgPr>
+    </p:bg>
+    <p:spTree>
+      <p:nvGrpSpPr>
+        <p:cNvPr id="1" name=""/>
+        <p:cNvGrpSpPr/>
+        <p:nvPr/>
+      </p:nvGrpSpPr>
+      <p:grpSpPr/>
+      <p:sp>
+        <p:nvSpPr>
+          <p:cNvPr id="2" name="TextBox 1"/>
+          <p:cNvSpPr txBox="1"/>
+          <p:nvPr/>
+        </p:nvSpPr>
+        <p:spPr>
+          <a:xfrm>
+            <a:off x="548640" y="411480"/>
+            <a:ext cx="11094415" cy="822960"/>
+          </a:xfrm>
+          <a:prstGeom prst="rect">
+            <a:avLst/>
+          </a:prstGeom>
+          <a:noFill/>
+        </p:spPr>
+        <p:txBody>
+          <a:bodyPr wrap="square" lIns="0" rIns="0" anchor="t">
+            <a:spAutoFit/>
+          </a:bodyPr>
+          <a:lstStyle/>
+          <a:p>
+            <a:r>
+              <a:rPr sz="3200" b="1">
+                <a:solidFill>
+                  <a:srgbClr val="261C33"/>
+                </a:solidFill>
+                <a:latin typeface="Cambria"/>
+              </a:rPr>
+              <a:t>(4) Conclusion: two models level at the top, read as bias and variance</a:t>
             </a:r>
           </a:p>
         </p:txBody>
@@ -4755,7 +7078,7 @@
                 </a:solidFill>
                 <a:latin typeface="Cambria"/>
               </a:rPr>
-              <a:t>~3</a:t>
+              <a:t>0.830</a:t>
             </a:r>
           </a:p>
           <a:p>
@@ -4766,7 +7089,7 @@
                 </a:solidFill>
                 <a:latin typeface="Calibri"/>
               </a:rPr>
-              <a:t>songs in 200: the forest's expected edge over logistic regression</a:t>
+              <a:t>random forest</a:t>
             </a:r>
           </a:p>
         </p:txBody>
@@ -4846,7 +7169,7 @@
                 </a:solidFill>
                 <a:latin typeface="Cambria"/>
               </a:rPr>
-              <a:t>0.80 to 0.86</a:t>
+              <a:t>0.826</a:t>
             </a:r>
           </a:p>
           <a:p>
@@ -4857,7 +7180,7 @@
                 </a:solidFill>
                 <a:latin typeface="Calibri"/>
               </a:rPr>
-              <a:t>what to expect on the 200 hidden songs</a:t>
+              <a:t>kNN on speechiness, loudness, acousticness, energy</a:t>
             </a:r>
           </a:p>
         </p:txBody>
@@ -4897,7 +7220,7 @@
                 </a:solidFill>
                 <a:latin typeface="Calibri"/>
               </a:rPr>
-              <a:t>Only the forest falls inside the one-error band, so the rule picks it outright</a:t>
+              <a:t>A line captures the main axis, loud versus acoustic, and nothing we turned moved logistic regression past 0.815</a:t>
             </a:r>
           </a:p>
           <a:p>
@@ -4914,7 +7237,7 @@
                 </a:solidFill>
                 <a:latin typeface="Calibri"/>
               </a:rPr>
-              <a:t>A looser rule, "not significantly worse at 5%", would hold seven methods and pick logistic regression</a:t>
+              <a:t>Trees find the thresholds a line misses, and pay in variance; averaging 300 of them, with random feature subsets, pays it down</a:t>
             </a:r>
           </a:p>
           <a:p>
@@ -4931,7 +7254,7 @@
                 </a:solidFill>
                 <a:latin typeface="Calibri"/>
               </a:rPr>
-              <a:t>The strictness was fixed before the numbers, which is what makes this a choice and not a sweep</a:t>
+              <a:t>kNN was last of the real methods until its distance was measured in the four features that matter; then its search settled and it gained three points</a:t>
             </a:r>
           </a:p>
           <a:p>
@@ -4948,7 +7271,24 @@
                 </a:solidFill>
                 <a:latin typeface="Calibri"/>
               </a:rPr>
-              <a:t>First on accuracy, balanced accuracy and AUC alike, so the win is not bought by leaning on "like"</a:t>
+              <a:t>On the 15 splits the variant screen never saw, the four-feature kNN is 0.001 behind the forest</a:t>
+            </a:r>
+          </a:p>
+          <a:p>
+            <a:pPr marL="256032" indent="-256032">
+              <a:spcAft>
+                <a:spcPts val="1000"/>
+              </a:spcAft>
+              <a:buChar char="•"/>
+            </a:pPr>
+            <a:r>
+              <a:rPr sz="1800" b="0">
+                <a:solidFill>
+                  <a:srgbClr val="261C33"/>
+                </a:solidFill>
+                <a:latin typeface="Calibri"/>
+              </a:rPr>
+              <a:t>The forest ranks songs better (ROC AUC 0.907 against 0.879); the rule decides on accuracy, as the leaderboard does</a:t>
             </a:r>
           </a:p>
         </p:txBody>
@@ -4961,7 +7301,7 @@
 </p:sld>
 </file>
 
-<file path=ppt/slides/slide11.xml><?xml version="1.0" encoding="utf-8"?>
+<file path=ppt/slides/slide13.xml><?xml version="1.0" encoding="utf-8"?>
 <p:sld xmlns:a="http://schemas.openxmlformats.org/drawingml/2006/main" xmlns:p="http://schemas.openxmlformats.org/presentationml/2006/main" xmlns:r="http://schemas.openxmlformats.org/officeDocument/2006/relationships">
   <p:cSld>
     <p:bg>
@@ -5008,7 +7348,7 @@
                 </a:solidFill>
                 <a:latin typeface="Cambria"/>
               </a:rPr>
-              <a:t>Production: one refit, one read of the test file</a:t>
+              <a:t>(4) How sure: a small edge, honestly sized</a:t>
             </a:r>
           </a:p>
         </p:txBody>
@@ -5088,7 +7428,7 @@
                 </a:solidFill>
                 <a:latin typeface="Cambria"/>
               </a:rPr>
-              <a:t>200</a:t>
+              <a:t>~1</a:t>
             </a:r>
           </a:p>
           <a:p>
@@ -5099,14 +7439,105 @@
                 </a:solidFill>
                 <a:latin typeface="Calibri"/>
               </a:rPr>
-              <a:t>songs predicted, 123 liked</a:t>
-            </a:r>
-          </a:p>
-        </p:txBody>
-      </p:sp>
-      <p:sp>
-        <p:nvSpPr>
-          <p:cNvPr id="5" name="TextBox 4"/>
+              <a:t>song in 200: the forest's expected edge over the four-feature kNN</a:t>
+            </a:r>
+          </a:p>
+        </p:txBody>
+      </p:sp>
+      <p:sp>
+        <p:nvSpPr>
+          <p:cNvPr id="5" name="Rounded Rectangle 4"/>
+          <p:cNvSpPr/>
+          <p:nvPr/>
+        </p:nvSpPr>
+        <p:spPr>
+          <a:xfrm>
+            <a:off x="4709160" y="1371600"/>
+            <a:ext cx="3840480" cy="1325880"/>
+          </a:xfrm>
+          <a:prstGeom prst="roundRect">
+            <a:avLst>
+              <a:gd name="adj" fmla="val 8000"/>
+            </a:avLst>
+          </a:prstGeom>
+          <a:solidFill>
+            <a:srgbClr val="F3EFF6"/>
+          </a:solidFill>
+          <a:ln>
+            <a:noFill/>
+          </a:ln>
+          <a:effectLst/>
+        </p:spPr>
+        <p:style>
+          <a:lnRef idx="1">
+            <a:schemeClr val="accent1"/>
+          </a:lnRef>
+          <a:fillRef idx="3">
+            <a:schemeClr val="accent1"/>
+          </a:fillRef>
+          <a:effectRef idx="2">
+            <a:schemeClr val="accent1"/>
+          </a:effectRef>
+          <a:fontRef idx="minor">
+            <a:schemeClr val="lt1"/>
+          </a:fontRef>
+        </p:style>
+        <p:txBody>
+          <a:bodyPr rtlCol="0" anchor="ctr"/>
+          <a:lstStyle/>
+          <a:p>
+            <a:pPr algn="ctr"/>
+          </a:p>
+        </p:txBody>
+      </p:sp>
+      <p:sp>
+        <p:nvSpPr>
+          <p:cNvPr id="6" name="TextBox 5"/>
+          <p:cNvSpPr txBox="1"/>
+          <p:nvPr/>
+        </p:nvSpPr>
+        <p:spPr>
+          <a:xfrm>
+            <a:off x="4937760" y="1481328"/>
+            <a:ext cx="3383280" cy="1143000"/>
+          </a:xfrm>
+          <a:prstGeom prst="rect">
+            <a:avLst/>
+          </a:prstGeom>
+          <a:noFill/>
+        </p:spPr>
+        <p:txBody>
+          <a:bodyPr wrap="square" lIns="0" rIns="0">
+            <a:spAutoFit/>
+          </a:bodyPr>
+          <a:lstStyle/>
+          <a:p>
+            <a:r>
+              <a:rPr sz="3400" b="1">
+                <a:solidFill>
+                  <a:srgbClr val="C98A12"/>
+                </a:solidFill>
+                <a:latin typeface="Cambria"/>
+              </a:rPr>
+              <a:t>0.80 to 0.86</a:t>
+            </a:r>
+          </a:p>
+          <a:p>
+            <a:r>
+              <a:rPr sz="1300" b="0">
+                <a:solidFill>
+                  <a:srgbClr val="6B5E78"/>
+                </a:solidFill>
+                <a:latin typeface="Calibri"/>
+              </a:rPr>
+              <a:t>what to expect on the 200 hidden songs</a:t>
+            </a:r>
+          </a:p>
+        </p:txBody>
+      </p:sp>
+      <p:sp>
+        <p:nvSpPr>
+          <p:cNvPr id="7" name="TextBox 6"/>
           <p:cNvSpPr txBox="1"/>
           <p:nvPr/>
         </p:nvSpPr>
@@ -5139,7 +7570,7 @@
                 </a:solidFill>
                 <a:latin typeface="Calibri"/>
               </a:rPr>
-              <a:t>Refit on all 736 songs with the same grid search: 300 trees, 25% of features per split, at least 3 songs per leaf</a:t>
+              <a:t>The two are within a point of each other with probability about one half, and the forest wins 14 of the 25 splits</a:t>
             </a:r>
           </a:p>
           <a:p>
@@ -5156,7 +7587,7 @@
                 </a:solidFill>
                 <a:latin typeface="Calibri"/>
               </a:rPr>
-              <a:t>The inner search scored that setting at 0.837; the setting barely matters, the grid's surface was flat across the sweep</a:t>
+              <a:t>A looser rule, "not significantly worse at 5%", would hold eight methods and pick logistic regression</a:t>
             </a:r>
           </a:p>
           <a:p>
@@ -5173,7 +7604,7 @@
                 </a:solidFill>
                 <a:latin typeface="Calibri"/>
               </a:rPr>
-              <a:t>songs_to_classify.csv read once, by this model, after the decision</a:t>
+              <a:t>The strictness was fixed before the numbers, which is what makes this a choice and not a sweep</a:t>
             </a:r>
           </a:p>
           <a:p>
@@ -5190,24 +7621,7 @@
                 </a:solidFill>
                 <a:latin typeface="Calibri"/>
               </a:rPr>
-              <a:t>The string is in results/submission-2026-10-01.txt, one character per test song in file order</a:t>
-            </a:r>
-          </a:p>
-          <a:p>
-            <a:pPr marL="256032" indent="-256032">
-              <a:spcAft>
-                <a:spcPts val="1000"/>
-              </a:spcAft>
-              <a:buChar char="•"/>
-            </a:pPr>
-            <a:r>
-              <a:rPr sz="1800" b="0">
-                <a:solidFill>
-                  <a:srgbClr val="261C33"/>
-                </a:solidFill>
-                <a:latin typeface="Calibri"/>
-              </a:rPr>
-              <a:t>4 test songs also appear in the training file; the forest predicts their known labels</a:t>
+              <a:t>The variant was picked on 10 of the 25 splits; the other 15 agree with them, so the promotion did not manufacture it</a:t>
             </a:r>
           </a:p>
         </p:txBody>
@@ -5220,7 +7634,7 @@
 </p:sld>
 </file>
 
-<file path=ppt/slides/slide12.xml><?xml version="1.0" encoding="utf-8"?>
+<file path=ppt/slides/slide14.xml><?xml version="1.0" encoding="utf-8"?>
 <p:sld xmlns:a="http://schemas.openxmlformats.org/drawingml/2006/main" xmlns:p="http://schemas.openxmlformats.org/presentationml/2006/main" xmlns:r="http://schemas.openxmlformats.org/officeDocument/2006/relationships">
   <p:cSld>
     <p:bg>
@@ -5267,6 +7681,265 @@
                 </a:solidFill>
                 <a:latin typeface="Cambria"/>
               </a:rPr>
+              <a:t>Production: one refit, one read of the test file</a:t>
+            </a:r>
+          </a:p>
+        </p:txBody>
+      </p:sp>
+      <p:sp>
+        <p:nvSpPr>
+          <p:cNvPr id="3" name="Rounded Rectangle 2"/>
+          <p:cNvSpPr/>
+          <p:nvPr/>
+        </p:nvSpPr>
+        <p:spPr>
+          <a:xfrm>
+            <a:off x="548640" y="1371600"/>
+            <a:ext cx="3840480" cy="1325880"/>
+          </a:xfrm>
+          <a:prstGeom prst="roundRect">
+            <a:avLst>
+              <a:gd name="adj" fmla="val 8000"/>
+            </a:avLst>
+          </a:prstGeom>
+          <a:solidFill>
+            <a:srgbClr val="F3EFF6"/>
+          </a:solidFill>
+          <a:ln>
+            <a:noFill/>
+          </a:ln>
+          <a:effectLst/>
+        </p:spPr>
+        <p:style>
+          <a:lnRef idx="1">
+            <a:schemeClr val="accent1"/>
+          </a:lnRef>
+          <a:fillRef idx="3">
+            <a:schemeClr val="accent1"/>
+          </a:fillRef>
+          <a:effectRef idx="2">
+            <a:schemeClr val="accent1"/>
+          </a:effectRef>
+          <a:fontRef idx="minor">
+            <a:schemeClr val="lt1"/>
+          </a:fontRef>
+        </p:style>
+        <p:txBody>
+          <a:bodyPr rtlCol="0" anchor="ctr"/>
+          <a:lstStyle/>
+          <a:p>
+            <a:pPr algn="ctr"/>
+          </a:p>
+        </p:txBody>
+      </p:sp>
+      <p:sp>
+        <p:nvSpPr>
+          <p:cNvPr id="4" name="TextBox 3"/>
+          <p:cNvSpPr txBox="1"/>
+          <p:nvPr/>
+        </p:nvSpPr>
+        <p:spPr>
+          <a:xfrm>
+            <a:off x="777240" y="1481328"/>
+            <a:ext cx="3383280" cy="1143000"/>
+          </a:xfrm>
+          <a:prstGeom prst="rect">
+            <a:avLst/>
+          </a:prstGeom>
+          <a:noFill/>
+        </p:spPr>
+        <p:txBody>
+          <a:bodyPr wrap="square" lIns="0" rIns="0">
+            <a:spAutoFit/>
+          </a:bodyPr>
+          <a:lstStyle/>
+          <a:p>
+            <a:r>
+              <a:rPr sz="3400" b="1">
+                <a:solidFill>
+                  <a:srgbClr val="C98A12"/>
+                </a:solidFill>
+                <a:latin typeface="Cambria"/>
+              </a:rPr>
+              <a:t>200</a:t>
+            </a:r>
+          </a:p>
+          <a:p>
+            <a:r>
+              <a:rPr sz="1300" b="0">
+                <a:solidFill>
+                  <a:srgbClr val="6B5E78"/>
+                </a:solidFill>
+                <a:latin typeface="Calibri"/>
+              </a:rPr>
+              <a:t>songs predicted by the random forest, 123 liked</a:t>
+            </a:r>
+          </a:p>
+        </p:txBody>
+      </p:sp>
+      <p:sp>
+        <p:nvSpPr>
+          <p:cNvPr id="5" name="TextBox 4"/>
+          <p:cNvSpPr txBox="1"/>
+          <p:nvPr/>
+        </p:nvSpPr>
+        <p:spPr>
+          <a:xfrm>
+            <a:off x="548640" y="3017520"/>
+            <a:ext cx="11094415" cy="3291840"/>
+          </a:xfrm>
+          <a:prstGeom prst="rect">
+            <a:avLst/>
+          </a:prstGeom>
+          <a:noFill/>
+        </p:spPr>
+        <p:txBody>
+          <a:bodyPr wrap="square" lIns="0" rIns="0">
+            <a:spAutoFit/>
+          </a:bodyPr>
+          <a:lstStyle/>
+          <a:p>
+            <a:pPr marL="256032" indent="-256032">
+              <a:spcAft>
+                <a:spcPts val="1000"/>
+              </a:spcAft>
+              <a:buChar char="•"/>
+            </a:pPr>
+            <a:r>
+              <a:rPr sz="1800" b="0">
+                <a:solidFill>
+                  <a:srgbClr val="261C33"/>
+                </a:solidFill>
+                <a:latin typeface="Calibri"/>
+              </a:rPr>
+              <a:t>The submitted string was made by the forest on 2026-10-01, before the variants; the four-feature kNN joined the comparison after it</a:t>
+            </a:r>
+          </a:p>
+          <a:p>
+            <a:pPr marL="256032" indent="-256032">
+              <a:spcAft>
+                <a:spcPts val="1000"/>
+              </a:spcAft>
+              <a:buChar char="•"/>
+            </a:pPr>
+            <a:r>
+              <a:rPr sz="1800" b="0">
+                <a:solidFill>
+                  <a:srgbClr val="261C33"/>
+                </a:solidFill>
+                <a:latin typeface="Calibri"/>
+              </a:rPr>
+              <a:t>Refit on all 736 songs with the same grid search: 300 trees, 25% of features per split, at least 3 songs per leaf</a:t>
+            </a:r>
+          </a:p>
+          <a:p>
+            <a:pPr marL="256032" indent="-256032">
+              <a:spcAft>
+                <a:spcPts val="1000"/>
+              </a:spcAft>
+              <a:buChar char="•"/>
+            </a:pPr>
+            <a:r>
+              <a:rPr sz="1800" b="0">
+                <a:solidFill>
+                  <a:srgbClr val="261C33"/>
+                </a:solidFill>
+                <a:latin typeface="Calibri"/>
+              </a:rPr>
+              <a:t>songs_to_classify.csv read once, by this model, after the decision</a:t>
+            </a:r>
+          </a:p>
+          <a:p>
+            <a:pPr marL="256032" indent="-256032">
+              <a:spcAft>
+                <a:spcPts val="1000"/>
+              </a:spcAft>
+              <a:buChar char="•"/>
+            </a:pPr>
+            <a:r>
+              <a:rPr sz="1800" b="0">
+                <a:solidFill>
+                  <a:srgbClr val="261C33"/>
+                </a:solidFill>
+                <a:latin typeface="Calibri"/>
+              </a:rPr>
+              <a:t>The string is in results/submission-2026-10-01.txt, one character per test song in file order</a:t>
+            </a:r>
+          </a:p>
+          <a:p>
+            <a:pPr marL="256032" indent="-256032">
+              <a:spcAft>
+                <a:spcPts val="1000"/>
+              </a:spcAft>
+              <a:buChar char="•"/>
+            </a:pPr>
+            <a:r>
+              <a:rPr sz="1800" b="0">
+                <a:solidFill>
+                  <a:srgbClr val="261C33"/>
+                </a:solidFill>
+                <a:latin typeface="Calibri"/>
+              </a:rPr>
+              <a:t>4 test songs also appear in the training file; the forest predicts their known labels</a:t>
+            </a:r>
+          </a:p>
+        </p:txBody>
+      </p:sp>
+    </p:spTree>
+  </p:cSld>
+  <p:clrMapOvr>
+    <a:masterClrMapping/>
+  </p:clrMapOvr>
+</p:sld>
+</file>
+
+<file path=ppt/slides/slide15.xml><?xml version="1.0" encoding="utf-8"?>
+<p:sld xmlns:a="http://schemas.openxmlformats.org/drawingml/2006/main" xmlns:p="http://schemas.openxmlformats.org/presentationml/2006/main" xmlns:r="http://schemas.openxmlformats.org/officeDocument/2006/relationships">
+  <p:cSld>
+    <p:bg>
+      <p:bgPr>
+        <a:solidFill>
+          <a:srgbClr val="FFFFFF"/>
+        </a:solidFill>
+        <a:effectLst/>
+      </p:bgPr>
+    </p:bg>
+    <p:spTree>
+      <p:nvGrpSpPr>
+        <p:cNvPr id="1" name=""/>
+        <p:cNvGrpSpPr/>
+        <p:nvPr/>
+      </p:nvGrpSpPr>
+      <p:grpSpPr/>
+      <p:sp>
+        <p:nvSpPr>
+          <p:cNvPr id="2" name="TextBox 1"/>
+          <p:cNvSpPr txBox="1"/>
+          <p:nvPr/>
+        </p:nvSpPr>
+        <p:spPr>
+          <a:xfrm>
+            <a:off x="548640" y="411480"/>
+            <a:ext cx="11094415" cy="822960"/>
+          </a:xfrm>
+          <a:prstGeom prst="rect">
+            <a:avLst/>
+          </a:prstGeom>
+          <a:noFill/>
+        </p:spPr>
+        <p:txBody>
+          <a:bodyPr wrap="square" lIns="0" rIns="0" anchor="t">
+            <a:spAutoFit/>
+          </a:bodyPr>
+          <a:lstStyle/>
+          <a:p>
+            <a:r>
+              <a:rPr sz="3200" b="1">
+                <a:solidFill>
+                  <a:srgbClr val="261C33"/>
+                </a:solidFill>
+                <a:latin typeface="Cambria"/>
+              </a:rPr>
               <a:t>The code: a small package, thin notebooks</a:t>
             </a:r>
           </a:p>
@@ -5378,7 +8051,7 @@
                 </a:solidFill>
                 <a:latin typeface="Courier New"/>
               </a:rPr>
-              <a:t>uv sync &amp;&amp; make data &amp;&amp; make test &amp;&amp; make sweep &amp;&amp; make predict</a:t>
+              <a:t>uv sync &amp;&amp; make data &amp;&amp; make test &amp;&amp; make sweep &amp;&amp; make synthesis &amp;&amp; make predict</a:t>
             </a:r>
             <a:r>
               <a:rPr sz="1900" b="0">
@@ -6846,7 +9519,7 @@
                 </a:solidFill>
                 <a:latin typeface="Calibri"/>
               </a:rPr>
-              <a:t>All 13 features used, none dropped: the weak ones cost little and the forest ignores noise well</a:t>
+              <a:t>All 13 features in every method of the comparison; the variants then tried subsets, and only the distance and covariance methods gained from dropping to the four strong ones</a:t>
             </a:r>
           </a:p>
           <a:p>
@@ -6928,6 +9601,693 @@
 </file>
 
 <file path=ppt/slides/slide6.xml><?xml version="1.0" encoding="utf-8"?>
+<p:sld xmlns:a="http://schemas.openxmlformats.org/drawingml/2006/main" xmlns:p="http://schemas.openxmlformats.org/presentationml/2006/main" xmlns:r="http://schemas.openxmlformats.org/officeDocument/2006/relationships">
+  <p:cSld>
+    <p:bg>
+      <p:bgPr>
+        <a:solidFill>
+          <a:srgbClr val="FFFFFF"/>
+        </a:solidFill>
+        <a:effectLst/>
+      </p:bgPr>
+    </p:bg>
+    <p:spTree>
+      <p:nvGrpSpPr>
+        <p:cNvPr id="1" name=""/>
+        <p:cNvGrpSpPr/>
+        <p:nvPr/>
+      </p:nvGrpSpPr>
+      <p:grpSpPr/>
+      <p:sp>
+        <p:nvSpPr>
+          <p:cNvPr id="2" name="TextBox 1"/>
+          <p:cNvSpPr txBox="1"/>
+          <p:nvPr/>
+        </p:nvSpPr>
+        <p:spPr>
+          <a:xfrm>
+            <a:off x="548640" y="411480"/>
+            <a:ext cx="11094415" cy="822960"/>
+          </a:xfrm>
+          <a:prstGeom prst="rect">
+            <a:avLst/>
+          </a:prstGeom>
+          <a:noFill/>
+        </p:spPr>
+        <p:txBody>
+          <a:bodyPr wrap="square" lIns="0" rIns="0" anchor="t">
+            <a:spAutoFit/>
+          </a:bodyPr>
+          <a:lstStyle/>
+          <a:p>
+            <a:r>
+              <a:rPr sz="3200" b="1">
+                <a:solidFill>
+                  <a:srgbClr val="261C33"/>
+                </a:solidFill>
+                <a:latin typeface="Cambria"/>
+              </a:rPr>
+              <a:t>(2) What the knobs did, family by family</a:t>
+            </a:r>
+          </a:p>
+        </p:txBody>
+      </p:sp>
+      <p:graphicFrame>
+        <p:nvGraphicFramePr>
+          <p:cNvPr id="3" name="Table 2"/>
+          <p:cNvGraphicFramePr>
+            <a:graphicFrameLocks noGrp="1"/>
+          </p:cNvGraphicFramePr>
+          <p:nvPr/>
+        </p:nvGraphicFramePr>
+        <p:xfrm>
+          <a:off x="548640" y="1371600"/>
+          <a:ext cx="11094414" cy="2304288"/>
+        </p:xfrm>
+        <a:graphic>
+          <a:graphicData uri="http://schemas.openxmlformats.org/drawingml/2006/table">
+            <a:tbl>
+              <a:tblPr firstRow="1" bandRow="1">
+                <a:tableStyleId>{5C22544A-7EE6-4342-B048-85BDC9FD1C3A}</a:tableStyleId>
+              </a:tblPr>
+              <a:tblGrid>
+                <a:gridCol w="1232712"/>
+                <a:gridCol w="5774286"/>
+                <a:gridCol w="4087416"/>
+              </a:tblGrid>
+              <a:tr h="384048">
+                <a:tc>
+                  <a:txBody>
+                    <a:bodyPr/>
+                    <a:lstStyle/>
+                    <a:p>
+                      <a:r>
+                        <a:rPr sz="1400" b="1">
+                          <a:solidFill>
+                            <a:srgbClr val="FFFFFF"/>
+                          </a:solidFill>
+                          <a:latin typeface="Calibri"/>
+                        </a:rPr>
+                        <a:t>family</a:t>
+                      </a:r>
+                    </a:p>
+                  </a:txBody>
+                  <a:tcPr marL="91440" marR="91440">
+                    <a:solidFill>
+                      <a:srgbClr val="261C33"/>
+                    </a:solidFill>
+                  </a:tcPr>
+                </a:tc>
+                <a:tc>
+                  <a:txBody>
+                    <a:bodyPr/>
+                    <a:lstStyle/>
+                    <a:p>
+                      <a:r>
+                        <a:rPr sz="1400" b="1">
+                          <a:solidFill>
+                            <a:srgbClr val="FFFFFF"/>
+                          </a:solidFill>
+                          <a:latin typeface="Calibri"/>
+                        </a:rPr>
+                        <a:t>moved it beyond the noise (screen, gap ± error)</a:t>
+                      </a:r>
+                    </a:p>
+                  </a:txBody>
+                  <a:tcPr marL="91440" marR="91440">
+                    <a:solidFill>
+                      <a:srgbClr val="261C33"/>
+                    </a:solidFill>
+                  </a:tcPr>
+                </a:tc>
+                <a:tc>
+                  <a:txBody>
+                    <a:bodyPr/>
+                    <a:lstStyle/>
+                    <a:p>
+                      <a:r>
+                        <a:rPr sz="1400" b="1">
+                          <a:solidFill>
+                            <a:srgbClr val="FFFFFF"/>
+                          </a:solidFill>
+                          <a:latin typeface="Calibri"/>
+                        </a:rPr>
+                        <a:t>did nothing</a:t>
+                      </a:r>
+                    </a:p>
+                  </a:txBody>
+                  <a:tcPr marL="91440" marR="91440">
+                    <a:solidFill>
+                      <a:srgbClr val="261C33"/>
+                    </a:solidFill>
+                  </a:tcPr>
+                </a:tc>
+              </a:tr>
+              <a:tr h="384048">
+                <a:tc>
+                  <a:txBody>
+                    <a:bodyPr/>
+                    <a:lstStyle/>
+                    <a:p>
+                      <a:r>
+                        <a:rPr sz="1400" b="1">
+                          <a:solidFill>
+                            <a:srgbClr val="261C33"/>
+                          </a:solidFill>
+                          <a:latin typeface="Calibri"/>
+                        </a:rPr>
+                        <a:t>Logistic regression</a:t>
+                      </a:r>
+                    </a:p>
+                  </a:txBody>
+                  <a:tcPr marL="91440" marR="91440">
+                    <a:solidFill>
+                      <a:srgbClr val="F3EFF6"/>
+                    </a:solidFill>
+                  </a:tcPr>
+                </a:tc>
+                <a:tc>
+                  <a:txBody>
+                    <a:bodyPr/>
+                    <a:lstStyle/>
+                    <a:p>
+                      <a:r>
+                        <a:rPr sz="1400" b="0">
+                          <a:solidFill>
+                            <a:srgbClr val="261C33"/>
+                          </a:solidFill>
+                          <a:latin typeface="Calibri"/>
+                        </a:rPr>
+                        <a:t>nothing; only C, which the search already finds</a:t>
+                      </a:r>
+                    </a:p>
+                  </a:txBody>
+                  <a:tcPr marL="91440" marR="91440">
+                    <a:solidFill>
+                      <a:srgbClr val="F3EFF6"/>
+                    </a:solidFill>
+                  </a:tcPr>
+                </a:tc>
+                <a:tc>
+                  <a:txBody>
+                    <a:bodyPr/>
+                    <a:lstStyle/>
+                    <a:p>
+                      <a:r>
+                        <a:rPr sz="1400" b="0">
+                          <a:solidFill>
+                            <a:srgbClr val="261C33"/>
+                          </a:solidFill>
+                          <a:latin typeface="Calibri"/>
+                        </a:rPr>
+                        <a:t>L1, elastic net, log, quantile, grouped or dropped categoricals</a:t>
+                      </a:r>
+                    </a:p>
+                  </a:txBody>
+                  <a:tcPr marL="91440" marR="91440">
+                    <a:solidFill>
+                      <a:srgbClr val="F3EFF6"/>
+                    </a:solidFill>
+                  </a:tcPr>
+                </a:tc>
+              </a:tr>
+              <a:tr h="384048">
+                <a:tc>
+                  <a:txBody>
+                    <a:bodyPr/>
+                    <a:lstStyle/>
+                    <a:p>
+                      <a:r>
+                        <a:rPr sz="1400" b="1">
+                          <a:solidFill>
+                            <a:srgbClr val="261C33"/>
+                          </a:solidFill>
+                          <a:latin typeface="Calibri"/>
+                        </a:rPr>
+                        <a:t>LDA, QDA</a:t>
+                      </a:r>
+                    </a:p>
+                  </a:txBody>
+                  <a:tcPr marL="91440" marR="91440">
+                    <a:solidFill>
+                      <a:srgbClr val="FFFFFF"/>
+                    </a:solidFill>
+                  </a:tcPr>
+                </a:tc>
+                <a:tc>
+                  <a:txBody>
+                    <a:bodyPr/>
+                    <a:lstStyle/>
+                    <a:p>
+                      <a:r>
+                        <a:rPr sz="1400" b="0">
+                          <a:solidFill>
+                            <a:srgbClr val="261C33"/>
+                          </a:solidFill>
+                          <a:latin typeface="Calibri"/>
+                        </a:rPr>
+                        <a:t>fewer parameters: shrinkage +0.012 ± 0.008, QDA on 4 features +0.015 ± 0.009</a:t>
+                      </a:r>
+                    </a:p>
+                  </a:txBody>
+                  <a:tcPr marL="91440" marR="91440">
+                    <a:solidFill>
+                      <a:srgbClr val="FFFFFF"/>
+                    </a:solidFill>
+                  </a:tcPr>
+                </a:tc>
+                <a:tc>
+                  <a:txBody>
+                    <a:bodyPr/>
+                    <a:lstStyle/>
+                    <a:p>
+                      <a:r>
+                        <a:rPr sz="1400" b="0">
+                          <a:solidFill>
+                            <a:srgbClr val="261C33"/>
+                          </a:solidFill>
+                          <a:latin typeface="Calibri"/>
+                        </a:rPr>
+                        <a:t>QDA without the categoricals</a:t>
+                      </a:r>
+                    </a:p>
+                  </a:txBody>
+                  <a:tcPr marL="91440" marR="91440">
+                    <a:solidFill>
+                      <a:srgbClr val="FFFFFF"/>
+                    </a:solidFill>
+                  </a:tcPr>
+                </a:tc>
+              </a:tr>
+              <a:tr h="384048">
+                <a:tc>
+                  <a:txBody>
+                    <a:bodyPr/>
+                    <a:lstStyle/>
+                    <a:p>
+                      <a:r>
+                        <a:rPr sz="1400" b="1">
+                          <a:solidFill>
+                            <a:srgbClr val="261C33"/>
+                          </a:solidFill>
+                          <a:latin typeface="Calibri"/>
+                        </a:rPr>
+                        <a:t>kNN</a:t>
+                      </a:r>
+                    </a:p>
+                  </a:txBody>
+                  <a:tcPr marL="91440" marR="91440">
+                    <a:solidFill>
+                      <a:srgbClr val="F3EFF6"/>
+                    </a:solidFill>
+                  </a:tcPr>
+                </a:tc>
+                <a:tc>
+                  <a:txBody>
+                    <a:bodyPr/>
+                    <a:lstStyle/>
+                    <a:p>
+                      <a:r>
+                        <a:rPr sz="1400" b="0">
+                          <a:solidFill>
+                            <a:srgbClr val="261C33"/>
+                          </a:solidFill>
+                          <a:latin typeface="Calibri"/>
+                        </a:rPr>
+                        <a:t>4 strong features only +0.020 ± 0.018 (promoted); robust scaling -0.043 ± 0.017</a:t>
+                      </a:r>
+                    </a:p>
+                  </a:txBody>
+                  <a:tcPr marL="91440" marR="91440">
+                    <a:solidFill>
+                      <a:srgbClr val="F3EFF6"/>
+                    </a:solidFill>
+                  </a:tcPr>
+                </a:tc>
+                <a:tc>
+                  <a:txBody>
+                    <a:bodyPr/>
+                    <a:lstStyle/>
+                    <a:p>
+                      <a:r>
+                        <a:rPr sz="1400" b="0">
+                          <a:solidFill>
+                            <a:srgbClr val="261C33"/>
+                          </a:solidFill>
+                          <a:latin typeface="Calibri"/>
+                        </a:rPr>
+                        <a:t>log, Manhattan</a:t>
+                      </a:r>
+                    </a:p>
+                  </a:txBody>
+                  <a:tcPr marL="91440" marR="91440">
+                    <a:solidFill>
+                      <a:srgbClr val="F3EFF6"/>
+                    </a:solidFill>
+                  </a:tcPr>
+                </a:tc>
+              </a:tr>
+              <a:tr h="384048">
+                <a:tc>
+                  <a:txBody>
+                    <a:bodyPr/>
+                    <a:lstStyle/>
+                    <a:p>
+                      <a:r>
+                        <a:rPr sz="1400" b="1">
+                          <a:solidFill>
+                            <a:srgbClr val="261C33"/>
+                          </a:solidFill>
+                          <a:latin typeface="Calibri"/>
+                        </a:rPr>
+                        <a:t>SVM</a:t>
+                      </a:r>
+                    </a:p>
+                  </a:txBody>
+                  <a:tcPr marL="91440" marR="91440">
+                    <a:solidFill>
+                      <a:srgbClr val="FFFFFF"/>
+                    </a:solidFill>
+                  </a:tcPr>
+                </a:tc>
+                <a:tc>
+                  <a:txBody>
+                    <a:bodyPr/>
+                    <a:lstStyle/>
+                    <a:p>
+                      <a:r>
+                        <a:rPr sz="1400" b="0">
+                          <a:solidFill>
+                            <a:srgbClr val="261C33"/>
+                          </a:solidFill>
+                          <a:latin typeface="Calibri"/>
+                        </a:rPr>
+                        <a:t>robust scaling -0.048 ± 0.015</a:t>
+                      </a:r>
+                    </a:p>
+                  </a:txBody>
+                  <a:tcPr marL="91440" marR="91440">
+                    <a:solidFill>
+                      <a:srgbClr val="FFFFFF"/>
+                    </a:solidFill>
+                  </a:tcPr>
+                </a:tc>
+                <a:tc>
+                  <a:txBody>
+                    <a:bodyPr/>
+                    <a:lstStyle/>
+                    <a:p>
+                      <a:r>
+                        <a:rPr sz="1400" b="0">
+                          <a:solidFill>
+                            <a:srgbClr val="261C33"/>
+                          </a:solidFill>
+                          <a:latin typeface="Calibri"/>
+                        </a:rPr>
+                        <a:t>polynomial kernel, log, 4 features against its own base</a:t>
+                      </a:r>
+                    </a:p>
+                  </a:txBody>
+                  <a:tcPr marL="91440" marR="91440">
+                    <a:solidFill>
+                      <a:srgbClr val="FFFFFF"/>
+                    </a:solidFill>
+                  </a:tcPr>
+                </a:tc>
+              </a:tr>
+              <a:tr h="384048">
+                <a:tc>
+                  <a:txBody>
+                    <a:bodyPr/>
+                    <a:lstStyle/>
+                    <a:p>
+                      <a:r>
+                        <a:rPr sz="1400" b="1">
+                          <a:solidFill>
+                            <a:srgbClr val="261C33"/>
+                          </a:solidFill>
+                          <a:latin typeface="Calibri"/>
+                        </a:rPr>
+                        <a:t>Trees</a:t>
+                      </a:r>
+                    </a:p>
+                  </a:txBody>
+                  <a:tcPr marL="91440" marR="91440">
+                    <a:solidFill>
+                      <a:srgbClr val="F3EFF6"/>
+                    </a:solidFill>
+                  </a:tcPr>
+                </a:tc>
+                <a:tc>
+                  <a:txBody>
+                    <a:bodyPr/>
+                    <a:lstStyle/>
+                    <a:p>
+                      <a:r>
+                        <a:rPr sz="1400" b="0">
+                          <a:solidFill>
+                            <a:srgbClr val="261C33"/>
+                          </a:solidFill>
+                          <a:latin typeface="Calibri"/>
+                        </a:rPr>
+                        <a:t>averaging: bagging +0.027 ± 0.015 over one tree, the forest +0.0095 ± 0.0066 over bagging</a:t>
+                      </a:r>
+                    </a:p>
+                  </a:txBody>
+                  <a:tcPr marL="91440" marR="91440">
+                    <a:solidFill>
+                      <a:srgbClr val="F3EFF6"/>
+                    </a:solidFill>
+                  </a:tcPr>
+                </a:tc>
+                <a:tc>
+                  <a:txBody>
+                    <a:bodyPr/>
+                    <a:lstStyle/>
+                    <a:p>
+                      <a:r>
+                        <a:rPr sz="1400" b="0">
+                          <a:solidFill>
+                            <a:srgbClr val="261C33"/>
+                          </a:solidFill>
+                          <a:latin typeface="Calibri"/>
+                        </a:rPr>
+                        <a:t>fewer features, grouped levels, depth limits, slower boosting</a:t>
+                      </a:r>
+                    </a:p>
+                  </a:txBody>
+                  <a:tcPr marL="91440" marR="91440">
+                    <a:solidFill>
+                      <a:srgbClr val="F3EFF6"/>
+                    </a:solidFill>
+                  </a:tcPr>
+                </a:tc>
+              </a:tr>
+            </a:tbl>
+          </a:graphicData>
+        </a:graphic>
+      </p:graphicFrame>
+    </p:spTree>
+  </p:cSld>
+  <p:clrMapOvr>
+    <a:masterClrMapping/>
+  </p:clrMapOvr>
+</p:sld>
+</file>
+
+<file path=ppt/slides/slide7.xml><?xml version="1.0" encoding="utf-8"?>
+<p:sld xmlns:a="http://schemas.openxmlformats.org/drawingml/2006/main" xmlns:p="http://schemas.openxmlformats.org/presentationml/2006/main" xmlns:r="http://schemas.openxmlformats.org/officeDocument/2006/relationships">
+  <p:cSld>
+    <p:bg>
+      <p:bgPr>
+        <a:solidFill>
+          <a:srgbClr val="FFFFFF"/>
+        </a:solidFill>
+        <a:effectLst/>
+      </p:bgPr>
+    </p:bg>
+    <p:spTree>
+      <p:nvGrpSpPr>
+        <p:cNvPr id="1" name=""/>
+        <p:cNvGrpSpPr/>
+        <p:nvPr/>
+      </p:nvGrpSpPr>
+      <p:grpSpPr/>
+      <p:sp>
+        <p:nvSpPr>
+          <p:cNvPr id="2" name="TextBox 1"/>
+          <p:cNvSpPr txBox="1"/>
+          <p:nvPr/>
+        </p:nvSpPr>
+        <p:spPr>
+          <a:xfrm>
+            <a:off x="548640" y="411480"/>
+            <a:ext cx="11094415" cy="822960"/>
+          </a:xfrm>
+          <a:prstGeom prst="rect">
+            <a:avLst/>
+          </a:prstGeom>
+          <a:noFill/>
+        </p:spPr>
+        <p:txBody>
+          <a:bodyPr wrap="square" lIns="0" rIns="0" anchor="t">
+            <a:spAutoFit/>
+          </a:bodyPr>
+          <a:lstStyle/>
+          <a:p>
+            <a:r>
+              <a:rPr sz="3200" b="1">
+                <a:solidFill>
+                  <a:srgbClr val="261C33"/>
+                </a:solidFill>
+                <a:latin typeface="Cambria"/>
+              </a:rPr>
+              <a:t>(2) Which features matter, across six methods</a:t>
+            </a:r>
+          </a:p>
+        </p:txBody>
+      </p:sp>
+      <p:sp>
+        <p:nvSpPr>
+          <p:cNvPr id="3" name="TextBox 2"/>
+          <p:cNvSpPr txBox="1"/>
+          <p:nvPr/>
+        </p:nvSpPr>
+        <p:spPr>
+          <a:xfrm>
+            <a:off x="548640" y="1371600"/>
+            <a:ext cx="4389120" cy="4937760"/>
+          </a:xfrm>
+          <a:prstGeom prst="rect">
+            <a:avLst/>
+          </a:prstGeom>
+          <a:noFill/>
+        </p:spPr>
+        <p:txBody>
+          <a:bodyPr wrap="square" lIns="0" rIns="0">
+            <a:spAutoFit/>
+          </a:bodyPr>
+          <a:lstStyle/>
+          <a:p>
+            <a:pPr marL="256032" indent="-256032">
+              <a:spcAft>
+                <a:spcPts val="1000"/>
+              </a:spcAft>
+              <a:buChar char="•"/>
+            </a:pPr>
+            <a:r>
+              <a:rPr sz="1600" b="0">
+                <a:solidFill>
+                  <a:srgbClr val="261C33"/>
+                </a:solidFill>
+                <a:latin typeface="Calibri"/>
+              </a:rPr>
+              <a:t>Drop in held-out accuracy when one feature is shuffled, each method tuned inside each of 10 splits</a:t>
+            </a:r>
+          </a:p>
+          <a:p>
+            <a:pPr marL="256032" indent="-256032">
+              <a:spcAft>
+                <a:spcPts val="1000"/>
+              </a:spcAft>
+              <a:buChar char="•"/>
+            </a:pPr>
+            <a:r>
+              <a:rPr sz="1600" b="0">
+                <a:solidFill>
+                  <a:srgbClr val="261C33"/>
+                </a:solidFill>
+                <a:latin typeface="Calibri"/>
+              </a:rPr>
+              <a:t>Speechiness is first for all six, worth 0.09 to 0.11 to every one of them</a:t>
+            </a:r>
+          </a:p>
+          <a:p>
+            <a:pPr marL="256032" indent="-256032">
+              <a:spcAft>
+                <a:spcPts val="1000"/>
+              </a:spcAft>
+              <a:buChar char="•"/>
+            </a:pPr>
+            <a:r>
+              <a:rPr sz="1600" b="0">
+                <a:solidFill>
+                  <a:srgbClr val="261C33"/>
+                </a:solidFill>
+                <a:latin typeface="Calibri"/>
+              </a:rPr>
+              <a:t>Acousticness is second-tier for all six; loudness and energy too, but they are twins, so methods split the credit</a:t>
+            </a:r>
+          </a:p>
+          <a:p>
+            <a:pPr marL="256032" indent="-256032">
+              <a:spcAft>
+                <a:spcPts val="1000"/>
+              </a:spcAft>
+              <a:buChar char="•"/>
+            </a:pPr>
+            <a:r>
+              <a:rPr sz="1600" b="0">
+                <a:solidFill>
+                  <a:srgbClr val="261C33"/>
+                </a:solidFill>
+                <a:latin typeface="Calibri"/>
+              </a:rPr>
+              <a:t>Tempo, key, mode, meter and valence are worth nothing to any method</a:t>
+            </a:r>
+          </a:p>
+          <a:p>
+            <a:pPr marL="256032" indent="-256032">
+              <a:spcAft>
+                <a:spcPts val="1000"/>
+              </a:spcAft>
+              <a:buChar char="•"/>
+            </a:pPr>
+            <a:r>
+              <a:rPr sz="1600" b="0">
+                <a:solidFill>
+                  <a:srgbClr val="261C33"/>
+                </a:solidFill>
+                <a:latin typeface="Calibri"/>
+              </a:rPr>
+              <a:t>Weak features matter only to kNN, which is being misled by them, not informed</a:t>
+            </a:r>
+          </a:p>
+        </p:txBody>
+      </p:sp>
+      <p:pic>
+        <p:nvPicPr>
+          <p:cNvPr id="4" name="Picture 3" descr="permutation-importance.png"/>
+          <p:cNvPicPr>
+            <a:picLocks noChangeAspect="1"/>
+          </p:cNvPicPr>
+          <p:nvPr/>
+        </p:nvPicPr>
+        <p:blipFill>
+          <a:blip r:embed="rId2"/>
+          <a:stretch>
+            <a:fillRect/>
+          </a:stretch>
+        </p:blipFill>
+        <p:spPr>
+          <a:xfrm>
+            <a:off x="5212080" y="1788262"/>
+            <a:ext cx="6430975" cy="4287316"/>
+          </a:xfrm>
+          <a:prstGeom prst="rect">
+            <a:avLst/>
+          </a:prstGeom>
+        </p:spPr>
+      </p:pic>
+    </p:spTree>
+  </p:cSld>
+  <p:clrMapOvr>
+    <a:masterClrMapping/>
+  </p:clrMapOvr>
+</p:sld>
+</file>
+
+<file path=ppt/slides/slide8.xml><?xml version="1.0" encoding="utf-8"?>
 <p:sld xmlns:a="http://schemas.openxmlformats.org/drawingml/2006/main" xmlns:p="http://schemas.openxmlformats.org/presentationml/2006/main" xmlns:r="http://schemas.openxmlformats.org/officeDocument/2006/relationships">
   <p:cSld>
     <p:bg>
@@ -7351,7 +10711,7 @@
 </p:sld>
 </file>
 
-<file path=ppt/slides/slide7.xml><?xml version="1.0" encoding="utf-8"?>
+<file path=ppt/slides/slide9.xml><?xml version="1.0" encoding="utf-8"?>
 <p:sld xmlns:a="http://schemas.openxmlformats.org/drawingml/2006/main" xmlns:p="http://schemas.openxmlformats.org/presentationml/2006/main" xmlns:r="http://schemas.openxmlformats.org/officeDocument/2006/relationships">
   <p:cSld>
     <p:bg>
@@ -7518,1655 +10878,6 @@
           </a:prstGeom>
         </p:spPr>
       </p:pic>
-    </p:spTree>
-  </p:cSld>
-  <p:clrMapOvr>
-    <a:masterClrMapping/>
-  </p:clrMapOvr>
-</p:sld>
-</file>
-
-<file path=ppt/slides/slide8.xml><?xml version="1.0" encoding="utf-8"?>
-<p:sld xmlns:a="http://schemas.openxmlformats.org/drawingml/2006/main" xmlns:p="http://schemas.openxmlformats.org/presentationml/2006/main" xmlns:r="http://schemas.openxmlformats.org/officeDocument/2006/relationships">
-  <p:cSld>
-    <p:bg>
-      <p:bgPr>
-        <a:solidFill>
-          <a:srgbClr val="FFFFFF"/>
-        </a:solidFill>
-        <a:effectLst/>
-      </p:bgPr>
-    </p:bg>
-    <p:spTree>
-      <p:nvGrpSpPr>
-        <p:cNvPr id="1" name=""/>
-        <p:cNvGrpSpPr/>
-        <p:nvPr/>
-      </p:nvGrpSpPr>
-      <p:grpSpPr/>
-      <p:sp>
-        <p:nvSpPr>
-          <p:cNvPr id="2" name="TextBox 1"/>
-          <p:cNvSpPr txBox="1"/>
-          <p:nvPr/>
-        </p:nvSpPr>
-        <p:spPr>
-          <a:xfrm>
-            <a:off x="548640" y="411480"/>
-            <a:ext cx="11094415" cy="822960"/>
-          </a:xfrm>
-          <a:prstGeom prst="rect">
-            <a:avLst/>
-          </a:prstGeom>
-          <a:noFill/>
-        </p:spPr>
-        <p:txBody>
-          <a:bodyPr wrap="square" lIns="0" rIns="0" anchor="t">
-            <a:spAutoFit/>
-          </a:bodyPr>
-          <a:lstStyle/>
-          <a:p>
-            <a:r>
-              <a:rPr sz="3200" b="1">
-                <a:solidFill>
-                  <a:srgbClr val="261C33"/>
-                </a:solidFill>
-                <a:latin typeface="Cambria"/>
-              </a:rPr>
-              <a:t>(3) Paired against the best method</a:t>
-            </a:r>
-          </a:p>
-        </p:txBody>
-      </p:sp>
-      <p:graphicFrame>
-        <p:nvGraphicFramePr>
-          <p:cNvPr id="3" name="Table 2"/>
-          <p:cNvGraphicFramePr>
-            <a:graphicFrameLocks noGrp="1"/>
-          </p:cNvGraphicFramePr>
-          <p:nvPr/>
-        </p:nvGraphicFramePr>
-        <p:xfrm>
-          <a:off x="548640" y="1371600"/>
-          <a:ext cx="11094412" cy="3840480"/>
-        </p:xfrm>
-        <a:graphic>
-          <a:graphicData uri="http://schemas.openxmlformats.org/drawingml/2006/table">
-            <a:tbl>
-              <a:tblPr firstRow="1" bandRow="1">
-                <a:tableStyleId>{5C22544A-7EE6-4342-B048-85BDC9FD1C3A}</a:tableStyleId>
-              </a:tblPr>
-              <a:tblGrid>
-                <a:gridCol w="3011341"/>
-                <a:gridCol w="1267933"/>
-                <a:gridCol w="1426424"/>
-                <a:gridCol w="2377374"/>
-                <a:gridCol w="950949"/>
-                <a:gridCol w="2060391"/>
-              </a:tblGrid>
-              <a:tr h="384048">
-                <a:tc>
-                  <a:txBody>
-                    <a:bodyPr/>
-                    <a:lstStyle/>
-                    <a:p>
-                      <a:r>
-                        <a:rPr sz="1400" b="1">
-                          <a:solidFill>
-                            <a:srgbClr val="FFFFFF"/>
-                          </a:solidFill>
-                          <a:latin typeface="Calibri"/>
-                        </a:rPr>
-                        <a:t>method</a:t>
-                      </a:r>
-                    </a:p>
-                  </a:txBody>
-                  <a:tcPr marL="91440" marR="91440">
-                    <a:solidFill>
-                      <a:srgbClr val="261C33"/>
-                    </a:solidFill>
-                  </a:tcPr>
-                </a:tc>
-                <a:tc>
-                  <a:txBody>
-                    <a:bodyPr/>
-                    <a:lstStyle/>
-                    <a:p>
-                      <a:r>
-                        <a:rPr sz="1400" b="1">
-                          <a:solidFill>
-                            <a:srgbClr val="FFFFFF"/>
-                          </a:solidFill>
-                          <a:latin typeface="Calibri"/>
-                        </a:rPr>
-                        <a:t>accuracy</a:t>
-                      </a:r>
-                    </a:p>
-                  </a:txBody>
-                  <a:tcPr marL="91440" marR="91440">
-                    <a:solidFill>
-                      <a:srgbClr val="261C33"/>
-                    </a:solidFill>
-                  </a:tcPr>
-                </a:tc>
-                <a:tc>
-                  <a:txBody>
-                    <a:bodyPr/>
-                    <a:lstStyle/>
-                    <a:p>
-                      <a:r>
-                        <a:rPr sz="1400" b="1">
-                          <a:solidFill>
-                            <a:srgbClr val="FFFFFF"/>
-                          </a:solidFill>
-                          <a:latin typeface="Calibri"/>
-                        </a:rPr>
-                        <a:t>gap to rf</a:t>
-                      </a:r>
-                    </a:p>
-                  </a:txBody>
-                  <a:tcPr marL="91440" marR="91440">
-                    <a:solidFill>
-                      <a:srgbClr val="261C33"/>
-                    </a:solidFill>
-                  </a:tcPr>
-                </a:tc>
-                <a:tc>
-                  <a:txBody>
-                    <a:bodyPr/>
-                    <a:lstStyle/>
-                    <a:p>
-                      <a:r>
-                        <a:rPr sz="1400" b="1">
-                          <a:solidFill>
-                            <a:srgbClr val="FFFFFF"/>
-                          </a:solidFill>
-                          <a:latin typeface="Calibri"/>
-                        </a:rPr>
-                        <a:t>corrected error</a:t>
-                      </a:r>
-                    </a:p>
-                  </a:txBody>
-                  <a:tcPr marL="91440" marR="91440">
-                    <a:solidFill>
-                      <a:srgbClr val="261C33"/>
-                    </a:solidFill>
-                  </a:tcPr>
-                </a:tc>
-                <a:tc>
-                  <a:txBody>
-                    <a:bodyPr/>
-                    <a:lstStyle/>
-                    <a:p>
-                      <a:r>
-                        <a:rPr sz="1400" b="1">
-                          <a:solidFill>
-                            <a:srgbClr val="FFFFFF"/>
-                          </a:solidFill>
-                          <a:latin typeface="Calibri"/>
-                        </a:rPr>
-                        <a:t>p</a:t>
-                      </a:r>
-                    </a:p>
-                  </a:txBody>
-                  <a:tcPr marL="91440" marR="91440">
-                    <a:solidFill>
-                      <a:srgbClr val="261C33"/>
-                    </a:solidFill>
-                  </a:tcPr>
-                </a:tc>
-                <a:tc>
-                  <a:txBody>
-                    <a:bodyPr/>
-                    <a:lstStyle/>
-                    <a:p>
-                      <a:r>
-                        <a:rPr sz="1400" b="1">
-                          <a:solidFill>
-                            <a:srgbClr val="FFFFFF"/>
-                          </a:solidFill>
-                          <a:latin typeface="Calibri"/>
-                        </a:rPr>
-                        <a:t>rf wins of 25</a:t>
-                      </a:r>
-                    </a:p>
-                  </a:txBody>
-                  <a:tcPr marL="91440" marR="91440">
-                    <a:solidFill>
-                      <a:srgbClr val="261C33"/>
-                    </a:solidFill>
-                  </a:tcPr>
-                </a:tc>
-              </a:tr>
-              <a:tr h="384048">
-                <a:tc>
-                  <a:txBody>
-                    <a:bodyPr/>
-                    <a:lstStyle/>
-                    <a:p>
-                      <a:r>
-                        <a:rPr sz="1400" b="1">
-                          <a:solidFill>
-                            <a:srgbClr val="261C33"/>
-                          </a:solidFill>
-                          <a:latin typeface="Calibri"/>
-                        </a:rPr>
-                        <a:t>Random forest</a:t>
-                      </a:r>
-                    </a:p>
-                  </a:txBody>
-                  <a:tcPr marL="91440" marR="91440">
-                    <a:solidFill>
-                      <a:srgbClr val="F3EFF6"/>
-                    </a:solidFill>
-                  </a:tcPr>
-                </a:tc>
-                <a:tc>
-                  <a:txBody>
-                    <a:bodyPr/>
-                    <a:lstStyle/>
-                    <a:p>
-                      <a:r>
-                        <a:rPr sz="1400" b="0">
-                          <a:solidFill>
-                            <a:srgbClr val="261C33"/>
-                          </a:solidFill>
-                          <a:latin typeface="Calibri"/>
-                        </a:rPr>
-                        <a:t>0.830</a:t>
-                      </a:r>
-                    </a:p>
-                  </a:txBody>
-                  <a:tcPr marL="91440" marR="91440">
-                    <a:solidFill>
-                      <a:srgbClr val="F3EFF6"/>
-                    </a:solidFill>
-                  </a:tcPr>
-                </a:tc>
-                <a:tc>
-                  <a:txBody>
-                    <a:bodyPr/>
-                    <a:lstStyle/>
-                    <a:p/>
-                  </a:txBody>
-                  <a:tcPr marL="91440" marR="91440">
-                    <a:solidFill>
-                      <a:srgbClr val="F3EFF6"/>
-                    </a:solidFill>
-                  </a:tcPr>
-                </a:tc>
-                <a:tc>
-                  <a:txBody>
-                    <a:bodyPr/>
-                    <a:lstStyle/>
-                    <a:p/>
-                  </a:txBody>
-                  <a:tcPr marL="91440" marR="91440">
-                    <a:solidFill>
-                      <a:srgbClr val="F3EFF6"/>
-                    </a:solidFill>
-                  </a:tcPr>
-                </a:tc>
-                <a:tc>
-                  <a:txBody>
-                    <a:bodyPr/>
-                    <a:lstStyle/>
-                    <a:p/>
-                  </a:txBody>
-                  <a:tcPr marL="91440" marR="91440">
-                    <a:solidFill>
-                      <a:srgbClr val="F3EFF6"/>
-                    </a:solidFill>
-                  </a:tcPr>
-                </a:tc>
-                <a:tc>
-                  <a:txBody>
-                    <a:bodyPr/>
-                    <a:lstStyle/>
-                    <a:p/>
-                  </a:txBody>
-                  <a:tcPr marL="91440" marR="91440">
-                    <a:solidFill>
-                      <a:srgbClr val="F3EFF6"/>
-                    </a:solidFill>
-                  </a:tcPr>
-                </a:tc>
-              </a:tr>
-              <a:tr h="384048">
-                <a:tc>
-                  <a:txBody>
-                    <a:bodyPr/>
-                    <a:lstStyle/>
-                    <a:p>
-                      <a:r>
-                        <a:rPr sz="1400" b="1">
-                          <a:solidFill>
-                            <a:srgbClr val="261C33"/>
-                          </a:solidFill>
-                          <a:latin typeface="Calibri"/>
-                        </a:rPr>
-                        <a:t>Bagging</a:t>
-                      </a:r>
-                    </a:p>
-                  </a:txBody>
-                  <a:tcPr marL="91440" marR="91440">
-                    <a:solidFill>
-                      <a:srgbClr val="FFFFFF"/>
-                    </a:solidFill>
-                  </a:tcPr>
-                </a:tc>
-                <a:tc>
-                  <a:txBody>
-                    <a:bodyPr/>
-                    <a:lstStyle/>
-                    <a:p>
-                      <a:r>
-                        <a:rPr sz="1400" b="0">
-                          <a:solidFill>
-                            <a:srgbClr val="261C33"/>
-                          </a:solidFill>
-                          <a:latin typeface="Calibri"/>
-                        </a:rPr>
-                        <a:t>0.820</a:t>
-                      </a:r>
-                    </a:p>
-                  </a:txBody>
-                  <a:tcPr marL="91440" marR="91440">
-                    <a:solidFill>
-                      <a:srgbClr val="FFFFFF"/>
-                    </a:solidFill>
-                  </a:tcPr>
-                </a:tc>
-                <a:tc>
-                  <a:txBody>
-                    <a:bodyPr/>
-                    <a:lstStyle/>
-                    <a:p>
-                      <a:r>
-                        <a:rPr sz="1400" b="0">
-                          <a:solidFill>
-                            <a:srgbClr val="261C33"/>
-                          </a:solidFill>
-                          <a:latin typeface="Calibri"/>
-                        </a:rPr>
-                        <a:t>-0.011</a:t>
-                      </a:r>
-                    </a:p>
-                  </a:txBody>
-                  <a:tcPr marL="91440" marR="91440">
-                    <a:solidFill>
-                      <a:srgbClr val="FFFFFF"/>
-                    </a:solidFill>
-                  </a:tcPr>
-                </a:tc>
-                <a:tc>
-                  <a:txBody>
-                    <a:bodyPr/>
-                    <a:lstStyle/>
-                    <a:p>
-                      <a:r>
-                        <a:rPr sz="1400" b="0">
-                          <a:solidFill>
-                            <a:srgbClr val="261C33"/>
-                          </a:solidFill>
-                          <a:latin typeface="Calibri"/>
-                        </a:rPr>
-                        <a:t>0.007</a:t>
-                      </a:r>
-                    </a:p>
-                  </a:txBody>
-                  <a:tcPr marL="91440" marR="91440">
-                    <a:solidFill>
-                      <a:srgbClr val="FFFFFF"/>
-                    </a:solidFill>
-                  </a:tcPr>
-                </a:tc>
-                <a:tc>
-                  <a:txBody>
-                    <a:bodyPr/>
-                    <a:lstStyle/>
-                    <a:p>
-                      <a:r>
-                        <a:rPr sz="1400" b="0">
-                          <a:solidFill>
-                            <a:srgbClr val="261C33"/>
-                          </a:solidFill>
-                          <a:latin typeface="Calibri"/>
-                        </a:rPr>
-                        <a:t>0.15</a:t>
-                      </a:r>
-                    </a:p>
-                  </a:txBody>
-                  <a:tcPr marL="91440" marR="91440">
-                    <a:solidFill>
-                      <a:srgbClr val="FFFFFF"/>
-                    </a:solidFill>
-                  </a:tcPr>
-                </a:tc>
-                <a:tc>
-                  <a:txBody>
-                    <a:bodyPr/>
-                    <a:lstStyle/>
-                    <a:p>
-                      <a:r>
-                        <a:rPr sz="1400" b="0">
-                          <a:solidFill>
-                            <a:srgbClr val="261C33"/>
-                          </a:solidFill>
-                          <a:latin typeface="Calibri"/>
-                        </a:rPr>
-                        <a:t>18</a:t>
-                      </a:r>
-                    </a:p>
-                  </a:txBody>
-                  <a:tcPr marL="91440" marR="91440">
-                    <a:solidFill>
-                      <a:srgbClr val="FFFFFF"/>
-                    </a:solidFill>
-                  </a:tcPr>
-                </a:tc>
-              </a:tr>
-              <a:tr h="384048">
-                <a:tc>
-                  <a:txBody>
-                    <a:bodyPr/>
-                    <a:lstStyle/>
-                    <a:p>
-                      <a:r>
-                        <a:rPr sz="1400" b="1">
-                          <a:solidFill>
-                            <a:srgbClr val="261C33"/>
-                          </a:solidFill>
-                          <a:latin typeface="Calibri"/>
-                        </a:rPr>
-                        <a:t>Gradient boosting</a:t>
-                      </a:r>
-                    </a:p>
-                  </a:txBody>
-                  <a:tcPr marL="91440" marR="91440">
-                    <a:solidFill>
-                      <a:srgbClr val="F3EFF6"/>
-                    </a:solidFill>
-                  </a:tcPr>
-                </a:tc>
-                <a:tc>
-                  <a:txBody>
-                    <a:bodyPr/>
-                    <a:lstStyle/>
-                    <a:p>
-                      <a:r>
-                        <a:rPr sz="1400" b="0">
-                          <a:solidFill>
-                            <a:srgbClr val="261C33"/>
-                          </a:solidFill>
-                          <a:latin typeface="Calibri"/>
-                        </a:rPr>
-                        <a:t>0.819</a:t>
-                      </a:r>
-                    </a:p>
-                  </a:txBody>
-                  <a:tcPr marL="91440" marR="91440">
-                    <a:solidFill>
-                      <a:srgbClr val="F3EFF6"/>
-                    </a:solidFill>
-                  </a:tcPr>
-                </a:tc>
-                <a:tc>
-                  <a:txBody>
-                    <a:bodyPr/>
-                    <a:lstStyle/>
-                    <a:p>
-                      <a:r>
-                        <a:rPr sz="1400" b="0">
-                          <a:solidFill>
-                            <a:srgbClr val="261C33"/>
-                          </a:solidFill>
-                          <a:latin typeface="Calibri"/>
-                        </a:rPr>
-                        <a:t>-0.011</a:t>
-                      </a:r>
-                    </a:p>
-                  </a:txBody>
-                  <a:tcPr marL="91440" marR="91440">
-                    <a:solidFill>
-                      <a:srgbClr val="F3EFF6"/>
-                    </a:solidFill>
-                  </a:tcPr>
-                </a:tc>
-                <a:tc>
-                  <a:txBody>
-                    <a:bodyPr/>
-                    <a:lstStyle/>
-                    <a:p>
-                      <a:r>
-                        <a:rPr sz="1400" b="0">
-                          <a:solidFill>
-                            <a:srgbClr val="261C33"/>
-                          </a:solidFill>
-                          <a:latin typeface="Calibri"/>
-                        </a:rPr>
-                        <a:t>0.009</a:t>
-                      </a:r>
-                    </a:p>
-                  </a:txBody>
-                  <a:tcPr marL="91440" marR="91440">
-                    <a:solidFill>
-                      <a:srgbClr val="F3EFF6"/>
-                    </a:solidFill>
-                  </a:tcPr>
-                </a:tc>
-                <a:tc>
-                  <a:txBody>
-                    <a:bodyPr/>
-                    <a:lstStyle/>
-                    <a:p>
-                      <a:r>
-                        <a:rPr sz="1400" b="0">
-                          <a:solidFill>
-                            <a:srgbClr val="261C33"/>
-                          </a:solidFill>
-                          <a:latin typeface="Calibri"/>
-                        </a:rPr>
-                        <a:t>0.24</a:t>
-                      </a:r>
-                    </a:p>
-                  </a:txBody>
-                  <a:tcPr marL="91440" marR="91440">
-                    <a:solidFill>
-                      <a:srgbClr val="F3EFF6"/>
-                    </a:solidFill>
-                  </a:tcPr>
-                </a:tc>
-                <a:tc>
-                  <a:txBody>
-                    <a:bodyPr/>
-                    <a:lstStyle/>
-                    <a:p>
-                      <a:r>
-                        <a:rPr sz="1400" b="0">
-                          <a:solidFill>
-                            <a:srgbClr val="261C33"/>
-                          </a:solidFill>
-                          <a:latin typeface="Calibri"/>
-                        </a:rPr>
-                        <a:t>19</a:t>
-                      </a:r>
-                    </a:p>
-                  </a:txBody>
-                  <a:tcPr marL="91440" marR="91440">
-                    <a:solidFill>
-                      <a:srgbClr val="F3EFF6"/>
-                    </a:solidFill>
-                  </a:tcPr>
-                </a:tc>
-              </a:tr>
-              <a:tr h="384048">
-                <a:tc>
-                  <a:txBody>
-                    <a:bodyPr/>
-                    <a:lstStyle/>
-                    <a:p>
-                      <a:r>
-                        <a:rPr sz="1400" b="1">
-                          <a:solidFill>
-                            <a:srgbClr val="261C33"/>
-                          </a:solidFill>
-                          <a:latin typeface="Calibri"/>
-                        </a:rPr>
-                        <a:t>Logistic regression</a:t>
-                      </a:r>
-                    </a:p>
-                  </a:txBody>
-                  <a:tcPr marL="91440" marR="91440">
-                    <a:solidFill>
-                      <a:srgbClr val="FFFFFF"/>
-                    </a:solidFill>
-                  </a:tcPr>
-                </a:tc>
-                <a:tc>
-                  <a:txBody>
-                    <a:bodyPr/>
-                    <a:lstStyle/>
-                    <a:p>
-                      <a:r>
-                        <a:rPr sz="1400" b="0">
-                          <a:solidFill>
-                            <a:srgbClr val="261C33"/>
-                          </a:solidFill>
-                          <a:latin typeface="Calibri"/>
-                        </a:rPr>
-                        <a:t>0.814</a:t>
-                      </a:r>
-                    </a:p>
-                  </a:txBody>
-                  <a:tcPr marL="91440" marR="91440">
-                    <a:solidFill>
-                      <a:srgbClr val="FFFFFF"/>
-                    </a:solidFill>
-                  </a:tcPr>
-                </a:tc>
-                <a:tc>
-                  <a:txBody>
-                    <a:bodyPr/>
-                    <a:lstStyle/>
-                    <a:p>
-                      <a:r>
-                        <a:rPr sz="1400" b="0">
-                          <a:solidFill>
-                            <a:srgbClr val="261C33"/>
-                          </a:solidFill>
-                          <a:latin typeface="Calibri"/>
-                        </a:rPr>
-                        <a:t>-0.016</a:t>
-                      </a:r>
-                    </a:p>
-                  </a:txBody>
-                  <a:tcPr marL="91440" marR="91440">
-                    <a:solidFill>
-                      <a:srgbClr val="FFFFFF"/>
-                    </a:solidFill>
-                  </a:tcPr>
-                </a:tc>
-                <a:tc>
-                  <a:txBody>
-                    <a:bodyPr/>
-                    <a:lstStyle/>
-                    <a:p>
-                      <a:r>
-                        <a:rPr sz="1400" b="0">
-                          <a:solidFill>
-                            <a:srgbClr val="261C33"/>
-                          </a:solidFill>
-                          <a:latin typeface="Calibri"/>
-                        </a:rPr>
-                        <a:t>0.015</a:t>
-                      </a:r>
-                    </a:p>
-                  </a:txBody>
-                  <a:tcPr marL="91440" marR="91440">
-                    <a:solidFill>
-                      <a:srgbClr val="FFFFFF"/>
-                    </a:solidFill>
-                  </a:tcPr>
-                </a:tc>
-                <a:tc>
-                  <a:txBody>
-                    <a:bodyPr/>
-                    <a:lstStyle/>
-                    <a:p>
-                      <a:r>
-                        <a:rPr sz="1400" b="0">
-                          <a:solidFill>
-                            <a:srgbClr val="261C33"/>
-                          </a:solidFill>
-                          <a:latin typeface="Calibri"/>
-                        </a:rPr>
-                        <a:t>0.29</a:t>
-                      </a:r>
-                    </a:p>
-                  </a:txBody>
-                  <a:tcPr marL="91440" marR="91440">
-                    <a:solidFill>
-                      <a:srgbClr val="FFFFFF"/>
-                    </a:solidFill>
-                  </a:tcPr>
-                </a:tc>
-                <a:tc>
-                  <a:txBody>
-                    <a:bodyPr/>
-                    <a:lstStyle/>
-                    <a:p>
-                      <a:r>
-                        <a:rPr sz="1400" b="0">
-                          <a:solidFill>
-                            <a:srgbClr val="261C33"/>
-                          </a:solidFill>
-                          <a:latin typeface="Calibri"/>
-                        </a:rPr>
-                        <a:t>18</a:t>
-                      </a:r>
-                    </a:p>
-                  </a:txBody>
-                  <a:tcPr marL="91440" marR="91440">
-                    <a:solidFill>
-                      <a:srgbClr val="FFFFFF"/>
-                    </a:solidFill>
-                  </a:tcPr>
-                </a:tc>
-              </a:tr>
-              <a:tr h="384048">
-                <a:tc>
-                  <a:txBody>
-                    <a:bodyPr/>
-                    <a:lstStyle/>
-                    <a:p>
-                      <a:r>
-                        <a:rPr sz="1400" b="1">
-                          <a:solidFill>
-                            <a:srgbClr val="261C33"/>
-                          </a:solidFill>
-                          <a:latin typeface="Calibri"/>
-                        </a:rPr>
-                        <a:t>RBF SVM</a:t>
-                      </a:r>
-                    </a:p>
-                  </a:txBody>
-                  <a:tcPr marL="91440" marR="91440">
-                    <a:solidFill>
-                      <a:srgbClr val="F3EFF6"/>
-                    </a:solidFill>
-                  </a:tcPr>
-                </a:tc>
-                <a:tc>
-                  <a:txBody>
-                    <a:bodyPr/>
-                    <a:lstStyle/>
-                    <a:p>
-                      <a:r>
-                        <a:rPr sz="1400" b="0">
-                          <a:solidFill>
-                            <a:srgbClr val="261C33"/>
-                          </a:solidFill>
-                          <a:latin typeface="Calibri"/>
-                        </a:rPr>
-                        <a:t>0.813</a:t>
-                      </a:r>
-                    </a:p>
-                  </a:txBody>
-                  <a:tcPr marL="91440" marR="91440">
-                    <a:solidFill>
-                      <a:srgbClr val="F3EFF6"/>
-                    </a:solidFill>
-                  </a:tcPr>
-                </a:tc>
-                <a:tc>
-                  <a:txBody>
-                    <a:bodyPr/>
-                    <a:lstStyle/>
-                    <a:p>
-                      <a:r>
-                        <a:rPr sz="1400" b="0">
-                          <a:solidFill>
-                            <a:srgbClr val="261C33"/>
-                          </a:solidFill>
-                          <a:latin typeface="Calibri"/>
-                        </a:rPr>
-                        <a:t>-0.017</a:t>
-                      </a:r>
-                    </a:p>
-                  </a:txBody>
-                  <a:tcPr marL="91440" marR="91440">
-                    <a:solidFill>
-                      <a:srgbClr val="F3EFF6"/>
-                    </a:solidFill>
-                  </a:tcPr>
-                </a:tc>
-                <a:tc>
-                  <a:txBody>
-                    <a:bodyPr/>
-                    <a:lstStyle/>
-                    <a:p>
-                      <a:r>
-                        <a:rPr sz="1400" b="0">
-                          <a:solidFill>
-                            <a:srgbClr val="261C33"/>
-                          </a:solidFill>
-                          <a:latin typeface="Calibri"/>
-                        </a:rPr>
-                        <a:t>0.015</a:t>
-                      </a:r>
-                    </a:p>
-                  </a:txBody>
-                  <a:tcPr marL="91440" marR="91440">
-                    <a:solidFill>
-                      <a:srgbClr val="F3EFF6"/>
-                    </a:solidFill>
-                  </a:tcPr>
-                </a:tc>
-                <a:tc>
-                  <a:txBody>
-                    <a:bodyPr/>
-                    <a:lstStyle/>
-                    <a:p>
-                      <a:r>
-                        <a:rPr sz="1400" b="0">
-                          <a:solidFill>
-                            <a:srgbClr val="261C33"/>
-                          </a:solidFill>
-                          <a:latin typeface="Calibri"/>
-                        </a:rPr>
-                        <a:t>0.28</a:t>
-                      </a:r>
-                    </a:p>
-                  </a:txBody>
-                  <a:tcPr marL="91440" marR="91440">
-                    <a:solidFill>
-                      <a:srgbClr val="F3EFF6"/>
-                    </a:solidFill>
-                  </a:tcPr>
-                </a:tc>
-                <a:tc>
-                  <a:txBody>
-                    <a:bodyPr/>
-                    <a:lstStyle/>
-                    <a:p>
-                      <a:r>
-                        <a:rPr sz="1400" b="0">
-                          <a:solidFill>
-                            <a:srgbClr val="261C33"/>
-                          </a:solidFill>
-                          <a:latin typeface="Calibri"/>
-                        </a:rPr>
-                        <a:t>17</a:t>
-                      </a:r>
-                    </a:p>
-                  </a:txBody>
-                  <a:tcPr marL="91440" marR="91440">
-                    <a:solidFill>
-                      <a:srgbClr val="F3EFF6"/>
-                    </a:solidFill>
-                  </a:tcPr>
-                </a:tc>
-              </a:tr>
-              <a:tr h="384048">
-                <a:tc>
-                  <a:txBody>
-                    <a:bodyPr/>
-                    <a:lstStyle/>
-                    <a:p>
-                      <a:r>
-                        <a:rPr sz="1400" b="1">
-                          <a:solidFill>
-                            <a:srgbClr val="261C33"/>
-                          </a:solidFill>
-                          <a:latin typeface="Calibri"/>
-                        </a:rPr>
-                        <a:t>LDA</a:t>
-                      </a:r>
-                    </a:p>
-                  </a:txBody>
-                  <a:tcPr marL="91440" marR="91440">
-                    <a:solidFill>
-                      <a:srgbClr val="FFFFFF"/>
-                    </a:solidFill>
-                  </a:tcPr>
-                </a:tc>
-                <a:tc>
-                  <a:txBody>
-                    <a:bodyPr/>
-                    <a:lstStyle/>
-                    <a:p>
-                      <a:r>
-                        <a:rPr sz="1400" b="0">
-                          <a:solidFill>
-                            <a:srgbClr val="261C33"/>
-                          </a:solidFill>
-                          <a:latin typeface="Calibri"/>
-                        </a:rPr>
-                        <a:t>0.799</a:t>
-                      </a:r>
-                    </a:p>
-                  </a:txBody>
-                  <a:tcPr marL="91440" marR="91440">
-                    <a:solidFill>
-                      <a:srgbClr val="FFFFFF"/>
-                    </a:solidFill>
-                  </a:tcPr>
-                </a:tc>
-                <a:tc>
-                  <a:txBody>
-                    <a:bodyPr/>
-                    <a:lstStyle/>
-                    <a:p>
-                      <a:r>
-                        <a:rPr sz="1400" b="0">
-                          <a:solidFill>
-                            <a:srgbClr val="261C33"/>
-                          </a:solidFill>
-                          <a:latin typeface="Calibri"/>
-                        </a:rPr>
-                        <a:t>-0.031</a:t>
-                      </a:r>
-                    </a:p>
-                  </a:txBody>
-                  <a:tcPr marL="91440" marR="91440">
-                    <a:solidFill>
-                      <a:srgbClr val="FFFFFF"/>
-                    </a:solidFill>
-                  </a:tcPr>
-                </a:tc>
-                <a:tc>
-                  <a:txBody>
-                    <a:bodyPr/>
-                    <a:lstStyle/>
-                    <a:p>
-                      <a:r>
-                        <a:rPr sz="1400" b="0">
-                          <a:solidFill>
-                            <a:srgbClr val="261C33"/>
-                          </a:solidFill>
-                          <a:latin typeface="Calibri"/>
-                        </a:rPr>
-                        <a:t>0.014</a:t>
-                      </a:r>
-                    </a:p>
-                  </a:txBody>
-                  <a:tcPr marL="91440" marR="91440">
-                    <a:solidFill>
-                      <a:srgbClr val="FFFFFF"/>
-                    </a:solidFill>
-                  </a:tcPr>
-                </a:tc>
-                <a:tc>
-                  <a:txBody>
-                    <a:bodyPr/>
-                    <a:lstStyle/>
-                    <a:p>
-                      <a:r>
-                        <a:rPr sz="1400" b="0">
-                          <a:solidFill>
-                            <a:srgbClr val="261C33"/>
-                          </a:solidFill>
-                          <a:latin typeface="Calibri"/>
-                        </a:rPr>
-                        <a:t>0.04</a:t>
-                      </a:r>
-                    </a:p>
-                  </a:txBody>
-                  <a:tcPr marL="91440" marR="91440">
-                    <a:solidFill>
-                      <a:srgbClr val="FFFFFF"/>
-                    </a:solidFill>
-                  </a:tcPr>
-                </a:tc>
-                <a:tc>
-                  <a:txBody>
-                    <a:bodyPr/>
-                    <a:lstStyle/>
-                    <a:p>
-                      <a:r>
-                        <a:rPr sz="1400" b="0">
-                          <a:solidFill>
-                            <a:srgbClr val="261C33"/>
-                          </a:solidFill>
-                          <a:latin typeface="Calibri"/>
-                        </a:rPr>
-                        <a:t>19</a:t>
-                      </a:r>
-                    </a:p>
-                  </a:txBody>
-                  <a:tcPr marL="91440" marR="91440">
-                    <a:solidFill>
-                      <a:srgbClr val="FFFFFF"/>
-                    </a:solidFill>
-                  </a:tcPr>
-                </a:tc>
-              </a:tr>
-              <a:tr h="384048">
-                <a:tc>
-                  <a:txBody>
-                    <a:bodyPr/>
-                    <a:lstStyle/>
-                    <a:p>
-                      <a:r>
-                        <a:rPr sz="1400" b="1">
-                          <a:solidFill>
-                            <a:srgbClr val="261C33"/>
-                          </a:solidFill>
-                          <a:latin typeface="Calibri"/>
-                        </a:rPr>
-                        <a:t>kNN</a:t>
-                      </a:r>
-                    </a:p>
-                  </a:txBody>
-                  <a:tcPr marL="91440" marR="91440">
-                    <a:solidFill>
-                      <a:srgbClr val="F3EFF6"/>
-                    </a:solidFill>
-                  </a:tcPr>
-                </a:tc>
-                <a:tc>
-                  <a:txBody>
-                    <a:bodyPr/>
-                    <a:lstStyle/>
-                    <a:p>
-                      <a:r>
-                        <a:rPr sz="1400" b="0">
-                          <a:solidFill>
-                            <a:srgbClr val="261C33"/>
-                          </a:solidFill>
-                          <a:latin typeface="Calibri"/>
-                        </a:rPr>
-                        <a:t>0.795</a:t>
-                      </a:r>
-                    </a:p>
-                  </a:txBody>
-                  <a:tcPr marL="91440" marR="91440">
-                    <a:solidFill>
-                      <a:srgbClr val="F3EFF6"/>
-                    </a:solidFill>
-                  </a:tcPr>
-                </a:tc>
-                <a:tc>
-                  <a:txBody>
-                    <a:bodyPr/>
-                    <a:lstStyle/>
-                    <a:p>
-                      <a:r>
-                        <a:rPr sz="1400" b="0">
-                          <a:solidFill>
-                            <a:srgbClr val="261C33"/>
-                          </a:solidFill>
-                          <a:latin typeface="Calibri"/>
-                        </a:rPr>
-                        <a:t>-0.035</a:t>
-                      </a:r>
-                    </a:p>
-                  </a:txBody>
-                  <a:tcPr marL="91440" marR="91440">
-                    <a:solidFill>
-                      <a:srgbClr val="F3EFF6"/>
-                    </a:solidFill>
-                  </a:tcPr>
-                </a:tc>
-                <a:tc>
-                  <a:txBody>
-                    <a:bodyPr/>
-                    <a:lstStyle/>
-                    <a:p>
-                      <a:r>
-                        <a:rPr sz="1400" b="0">
-                          <a:solidFill>
-                            <a:srgbClr val="261C33"/>
-                          </a:solidFill>
-                          <a:latin typeface="Calibri"/>
-                        </a:rPr>
-                        <a:t>0.014</a:t>
-                      </a:r>
-                    </a:p>
-                  </a:txBody>
-                  <a:tcPr marL="91440" marR="91440">
-                    <a:solidFill>
-                      <a:srgbClr val="F3EFF6"/>
-                    </a:solidFill>
-                  </a:tcPr>
-                </a:tc>
-                <a:tc>
-                  <a:txBody>
-                    <a:bodyPr/>
-                    <a:lstStyle/>
-                    <a:p>
-                      <a:r>
-                        <a:rPr sz="1400" b="0">
-                          <a:solidFill>
-                            <a:srgbClr val="261C33"/>
-                          </a:solidFill>
-                          <a:latin typeface="Calibri"/>
-                        </a:rPr>
-                        <a:t>0.02</a:t>
-                      </a:r>
-                    </a:p>
-                  </a:txBody>
-                  <a:tcPr marL="91440" marR="91440">
-                    <a:solidFill>
-                      <a:srgbClr val="F3EFF6"/>
-                    </a:solidFill>
-                  </a:tcPr>
-                </a:tc>
-                <a:tc>
-                  <a:txBody>
-                    <a:bodyPr/>
-                    <a:lstStyle/>
-                    <a:p>
-                      <a:r>
-                        <a:rPr sz="1400" b="0">
-                          <a:solidFill>
-                            <a:srgbClr val="261C33"/>
-                          </a:solidFill>
-                          <a:latin typeface="Calibri"/>
-                        </a:rPr>
-                        <a:t>22</a:t>
-                      </a:r>
-                    </a:p>
-                  </a:txBody>
-                  <a:tcPr marL="91440" marR="91440">
-                    <a:solidFill>
-                      <a:srgbClr val="F3EFF6"/>
-                    </a:solidFill>
-                  </a:tcPr>
-                </a:tc>
-              </a:tr>
-              <a:tr h="384048">
-                <a:tc>
-                  <a:txBody>
-                    <a:bodyPr/>
-                    <a:lstStyle/>
-                    <a:p>
-                      <a:r>
-                        <a:rPr sz="1400" b="1">
-                          <a:solidFill>
-                            <a:srgbClr val="261C33"/>
-                          </a:solidFill>
-                          <a:latin typeface="Calibri"/>
-                        </a:rPr>
-                        <a:t>Decision tree</a:t>
-                      </a:r>
-                    </a:p>
-                  </a:txBody>
-                  <a:tcPr marL="91440" marR="91440">
-                    <a:solidFill>
-                      <a:srgbClr val="FFFFFF"/>
-                    </a:solidFill>
-                  </a:tcPr>
-                </a:tc>
-                <a:tc>
-                  <a:txBody>
-                    <a:bodyPr/>
-                    <a:lstStyle/>
-                    <a:p>
-                      <a:r>
-                        <a:rPr sz="1400" b="0">
-                          <a:solidFill>
-                            <a:srgbClr val="261C33"/>
-                          </a:solidFill>
-                          <a:latin typeface="Calibri"/>
-                        </a:rPr>
-                        <a:t>0.790</a:t>
-                      </a:r>
-                    </a:p>
-                  </a:txBody>
-                  <a:tcPr marL="91440" marR="91440">
-                    <a:solidFill>
-                      <a:srgbClr val="FFFFFF"/>
-                    </a:solidFill>
-                  </a:tcPr>
-                </a:tc>
-                <a:tc>
-                  <a:txBody>
-                    <a:bodyPr/>
-                    <a:lstStyle/>
-                    <a:p>
-                      <a:r>
-                        <a:rPr sz="1400" b="0">
-                          <a:solidFill>
-                            <a:srgbClr val="261C33"/>
-                          </a:solidFill>
-                          <a:latin typeface="Calibri"/>
-                        </a:rPr>
-                        <a:t>-0.041</a:t>
-                      </a:r>
-                    </a:p>
-                  </a:txBody>
-                  <a:tcPr marL="91440" marR="91440">
-                    <a:solidFill>
-                      <a:srgbClr val="FFFFFF"/>
-                    </a:solidFill>
-                  </a:tcPr>
-                </a:tc>
-                <a:tc>
-                  <a:txBody>
-                    <a:bodyPr/>
-                    <a:lstStyle/>
-                    <a:p>
-                      <a:r>
-                        <a:rPr sz="1400" b="0">
-                          <a:solidFill>
-                            <a:srgbClr val="261C33"/>
-                          </a:solidFill>
-                          <a:latin typeface="Calibri"/>
-                        </a:rPr>
-                        <a:t>0.017</a:t>
-                      </a:r>
-                    </a:p>
-                  </a:txBody>
-                  <a:tcPr marL="91440" marR="91440">
-                    <a:solidFill>
-                      <a:srgbClr val="FFFFFF"/>
-                    </a:solidFill>
-                  </a:tcPr>
-                </a:tc>
-                <a:tc>
-                  <a:txBody>
-                    <a:bodyPr/>
-                    <a:lstStyle/>
-                    <a:p>
-                      <a:r>
-                        <a:rPr sz="1400" b="0">
-                          <a:solidFill>
-                            <a:srgbClr val="261C33"/>
-                          </a:solidFill>
-                          <a:latin typeface="Calibri"/>
-                        </a:rPr>
-                        <a:t>0.03</a:t>
-                      </a:r>
-                    </a:p>
-                  </a:txBody>
-                  <a:tcPr marL="91440" marR="91440">
-                    <a:solidFill>
-                      <a:srgbClr val="FFFFFF"/>
-                    </a:solidFill>
-                  </a:tcPr>
-                </a:tc>
-                <a:tc>
-                  <a:txBody>
-                    <a:bodyPr/>
-                    <a:lstStyle/>
-                    <a:p>
-                      <a:r>
-                        <a:rPr sz="1400" b="0">
-                          <a:solidFill>
-                            <a:srgbClr val="261C33"/>
-                          </a:solidFill>
-                          <a:latin typeface="Calibri"/>
-                        </a:rPr>
-                        <a:t>22</a:t>
-                      </a:r>
-                    </a:p>
-                  </a:txBody>
-                  <a:tcPr marL="91440" marR="91440">
-                    <a:solidFill>
-                      <a:srgbClr val="FFFFFF"/>
-                    </a:solidFill>
-                  </a:tcPr>
-                </a:tc>
-              </a:tr>
-              <a:tr h="384048">
-                <a:tc>
-                  <a:txBody>
-                    <a:bodyPr/>
-                    <a:lstStyle/>
-                    <a:p>
-                      <a:r>
-                        <a:rPr sz="1400" b="1">
-                          <a:solidFill>
-                            <a:srgbClr val="261C33"/>
-                          </a:solidFill>
-                          <a:latin typeface="Calibri"/>
-                        </a:rPr>
-                        <a:t>QDA</a:t>
-                      </a:r>
-                    </a:p>
-                  </a:txBody>
-                  <a:tcPr marL="91440" marR="91440">
-                    <a:solidFill>
-                      <a:srgbClr val="F3EFF6"/>
-                    </a:solidFill>
-                  </a:tcPr>
-                </a:tc>
-                <a:tc>
-                  <a:txBody>
-                    <a:bodyPr/>
-                    <a:lstStyle/>
-                    <a:p>
-                      <a:r>
-                        <a:rPr sz="1400" b="0">
-                          <a:solidFill>
-                            <a:srgbClr val="261C33"/>
-                          </a:solidFill>
-                          <a:latin typeface="Calibri"/>
-                        </a:rPr>
-                        <a:t>0.783</a:t>
-                      </a:r>
-                    </a:p>
-                  </a:txBody>
-                  <a:tcPr marL="91440" marR="91440">
-                    <a:solidFill>
-                      <a:srgbClr val="F3EFF6"/>
-                    </a:solidFill>
-                  </a:tcPr>
-                </a:tc>
-                <a:tc>
-                  <a:txBody>
-                    <a:bodyPr/>
-                    <a:lstStyle/>
-                    <a:p>
-                      <a:r>
-                        <a:rPr sz="1400" b="0">
-                          <a:solidFill>
-                            <a:srgbClr val="261C33"/>
-                          </a:solidFill>
-                          <a:latin typeface="Calibri"/>
-                        </a:rPr>
-                        <a:t>-0.047</a:t>
-                      </a:r>
-                    </a:p>
-                  </a:txBody>
-                  <a:tcPr marL="91440" marR="91440">
-                    <a:solidFill>
-                      <a:srgbClr val="F3EFF6"/>
-                    </a:solidFill>
-                  </a:tcPr>
-                </a:tc>
-                <a:tc>
-                  <a:txBody>
-                    <a:bodyPr/>
-                    <a:lstStyle/>
-                    <a:p>
-                      <a:r>
-                        <a:rPr sz="1400" b="0">
-                          <a:solidFill>
-                            <a:srgbClr val="261C33"/>
-                          </a:solidFill>
-                          <a:latin typeface="Calibri"/>
-                        </a:rPr>
-                        <a:t>0.020</a:t>
-                      </a:r>
-                    </a:p>
-                  </a:txBody>
-                  <a:tcPr marL="91440" marR="91440">
-                    <a:solidFill>
-                      <a:srgbClr val="F3EFF6"/>
-                    </a:solidFill>
-                  </a:tcPr>
-                </a:tc>
-                <a:tc>
-                  <a:txBody>
-                    <a:bodyPr/>
-                    <a:lstStyle/>
-                    <a:p>
-                      <a:r>
-                        <a:rPr sz="1400" b="0">
-                          <a:solidFill>
-                            <a:srgbClr val="261C33"/>
-                          </a:solidFill>
-                          <a:latin typeface="Calibri"/>
-                        </a:rPr>
-                        <a:t>0.02</a:t>
-                      </a:r>
-                    </a:p>
-                  </a:txBody>
-                  <a:tcPr marL="91440" marR="91440">
-                    <a:solidFill>
-                      <a:srgbClr val="F3EFF6"/>
-                    </a:solidFill>
-                  </a:tcPr>
-                </a:tc>
-                <a:tc>
-                  <a:txBody>
-                    <a:bodyPr/>
-                    <a:lstStyle/>
-                    <a:p>
-                      <a:r>
-                        <a:rPr sz="1400" b="0">
-                          <a:solidFill>
-                            <a:srgbClr val="261C33"/>
-                          </a:solidFill>
-                          <a:latin typeface="Calibri"/>
-                        </a:rPr>
-                        <a:t>22</a:t>
-                      </a:r>
-                    </a:p>
-                  </a:txBody>
-                  <a:tcPr marL="91440" marR="91440">
-                    <a:solidFill>
-                      <a:srgbClr val="F3EFF6"/>
-                    </a:solidFill>
-                  </a:tcPr>
-                </a:tc>
-              </a:tr>
-            </a:tbl>
-          </a:graphicData>
-        </a:graphic>
-      </p:graphicFrame>
-    </p:spTree>
-  </p:cSld>
-  <p:clrMapOvr>
-    <a:masterClrMapping/>
-  </p:clrMapOvr>
-</p:sld>
-</file>
-
-<file path=ppt/slides/slide9.xml><?xml version="1.0" encoding="utf-8"?>
-<p:sld xmlns:a="http://schemas.openxmlformats.org/drawingml/2006/main" xmlns:p="http://schemas.openxmlformats.org/presentationml/2006/main" xmlns:r="http://schemas.openxmlformats.org/officeDocument/2006/relationships">
-  <p:cSld>
-    <p:bg>
-      <p:bgPr>
-        <a:solidFill>
-          <a:srgbClr val="FFFFFF"/>
-        </a:solidFill>
-        <a:effectLst/>
-      </p:bgPr>
-    </p:bg>
-    <p:spTree>
-      <p:nvGrpSpPr>
-        <p:cNvPr id="1" name=""/>
-        <p:cNvGrpSpPr/>
-        <p:nvPr/>
-      </p:nvGrpSpPr>
-      <p:grpSpPr/>
-      <p:sp>
-        <p:nvSpPr>
-          <p:cNvPr id="2" name="TextBox 1"/>
-          <p:cNvSpPr txBox="1"/>
-          <p:nvPr/>
-        </p:nvSpPr>
-        <p:spPr>
-          <a:xfrm>
-            <a:off x="548640" y="411480"/>
-            <a:ext cx="11094415" cy="822960"/>
-          </a:xfrm>
-          <a:prstGeom prst="rect">
-            <a:avLst/>
-          </a:prstGeom>
-          <a:noFill/>
-        </p:spPr>
-        <p:txBody>
-          <a:bodyPr wrap="square" lIns="0" rIns="0" anchor="t">
-            <a:spAutoFit/>
-          </a:bodyPr>
-          <a:lstStyle/>
-          <a:p>
-            <a:r>
-              <a:rPr sz="3200" b="1">
-                <a:solidFill>
-                  <a:srgbClr val="261C33"/>
-                </a:solidFill>
-                <a:latin typeface="Cambria"/>
-              </a:rPr>
-              <a:t>(4) Conclusion: the random forest, read as bias and variance</a:t>
-            </a:r>
-          </a:p>
-        </p:txBody>
-      </p:sp>
-      <p:sp>
-        <p:nvSpPr>
-          <p:cNvPr id="3" name="Rounded Rectangle 2"/>
-          <p:cNvSpPr/>
-          <p:nvPr/>
-        </p:nvSpPr>
-        <p:spPr>
-          <a:xfrm>
-            <a:off x="548640" y="1371600"/>
-            <a:ext cx="3840480" cy="1325880"/>
-          </a:xfrm>
-          <a:prstGeom prst="roundRect">
-            <a:avLst>
-              <a:gd name="adj" fmla="val 8000"/>
-            </a:avLst>
-          </a:prstGeom>
-          <a:solidFill>
-            <a:srgbClr val="F3EFF6"/>
-          </a:solidFill>
-          <a:ln>
-            <a:noFill/>
-          </a:ln>
-          <a:effectLst/>
-        </p:spPr>
-        <p:style>
-          <a:lnRef idx="1">
-            <a:schemeClr val="accent1"/>
-          </a:lnRef>
-          <a:fillRef idx="3">
-            <a:schemeClr val="accent1"/>
-          </a:fillRef>
-          <a:effectRef idx="2">
-            <a:schemeClr val="accent1"/>
-          </a:effectRef>
-          <a:fontRef idx="minor">
-            <a:schemeClr val="lt1"/>
-          </a:fontRef>
-        </p:style>
-        <p:txBody>
-          <a:bodyPr rtlCol="0" anchor="ctr"/>
-          <a:lstStyle/>
-          <a:p>
-            <a:pPr algn="ctr"/>
-          </a:p>
-        </p:txBody>
-      </p:sp>
-      <p:sp>
-        <p:nvSpPr>
-          <p:cNvPr id="4" name="TextBox 3"/>
-          <p:cNvSpPr txBox="1"/>
-          <p:nvPr/>
-        </p:nvSpPr>
-        <p:spPr>
-          <a:xfrm>
-            <a:off x="777240" y="1481328"/>
-            <a:ext cx="3383280" cy="1143000"/>
-          </a:xfrm>
-          <a:prstGeom prst="rect">
-            <a:avLst/>
-          </a:prstGeom>
-          <a:noFill/>
-        </p:spPr>
-        <p:txBody>
-          <a:bodyPr wrap="square" lIns="0" rIns="0">
-            <a:spAutoFit/>
-          </a:bodyPr>
-          <a:lstStyle/>
-          <a:p>
-            <a:r>
-              <a:rPr sz="3400" b="1">
-                <a:solidFill>
-                  <a:srgbClr val="C98A12"/>
-                </a:solidFill>
-                <a:latin typeface="Cambria"/>
-              </a:rPr>
-              <a:t>0.830</a:t>
-            </a:r>
-          </a:p>
-          <a:p>
-            <a:r>
-              <a:rPr sz="1300" b="0">
-                <a:solidFill>
-                  <a:srgbClr val="6B5E78"/>
-                </a:solidFill>
-                <a:latin typeface="Calibri"/>
-              </a:rPr>
-              <a:t>random forest, ± 0.014 over 25 splits</a:t>
-            </a:r>
-          </a:p>
-        </p:txBody>
-      </p:sp>
-      <p:sp>
-        <p:nvSpPr>
-          <p:cNvPr id="5" name="TextBox 4"/>
-          <p:cNvSpPr txBox="1"/>
-          <p:nvPr/>
-        </p:nvSpPr>
-        <p:spPr>
-          <a:xfrm>
-            <a:off x="548640" y="3017520"/>
-            <a:ext cx="11094415" cy="3291840"/>
-          </a:xfrm>
-          <a:prstGeom prst="rect">
-            <a:avLst/>
-          </a:prstGeom>
-          <a:noFill/>
-        </p:spPr>
-        <p:txBody>
-          <a:bodyPr wrap="square" lIns="0" rIns="0">
-            <a:spAutoFit/>
-          </a:bodyPr>
-          <a:lstStyle/>
-          <a:p>
-            <a:pPr marL="256032" indent="-256032">
-              <a:spcAft>
-                <a:spcPts val="1000"/>
-              </a:spcAft>
-              <a:buChar char="•"/>
-            </a:pPr>
-            <a:r>
-              <a:rPr sz="1800" b="0">
-                <a:solidFill>
-                  <a:srgbClr val="261C33"/>
-                </a:solidFill>
-                <a:latin typeface="Calibri"/>
-              </a:rPr>
-              <a:t>A line captures the main axis; logistic regression reaches 0.814 with heavy shrinkage</a:t>
-            </a:r>
-          </a:p>
-          <a:p>
-            <a:pPr marL="256032" indent="-256032">
-              <a:spcAft>
-                <a:spcPts val="1000"/>
-              </a:spcAft>
-              <a:buChar char="•"/>
-            </a:pPr>
-            <a:r>
-              <a:rPr sz="1800" b="0">
-                <a:solidFill>
-                  <a:srgbClr val="261C33"/>
-                </a:solidFill>
-                <a:latin typeface="Calibri"/>
-              </a:rPr>
-              <a:t>What a line misses are thresholds and interactions (every song under -20 dB is liked), which trees find</a:t>
-            </a:r>
-          </a:p>
-          <a:p>
-            <a:pPr marL="256032" indent="-256032">
-              <a:spcAft>
-                <a:spcPts val="1000"/>
-              </a:spcAft>
-              <a:buChar char="•"/>
-            </a:pPr>
-            <a:r>
-              <a:rPr sz="1800" b="0">
-                <a:solidFill>
-                  <a:srgbClr val="261C33"/>
-                </a:solidFill>
-                <a:latin typeface="Calibri"/>
-              </a:rPr>
-              <a:t>One tree finds them but pays in variance (0.790); averaging 300 trees keeps the low bias and pays the variance down (bagging 0.820)</a:t>
-            </a:r>
-          </a:p>
-          <a:p>
-            <a:pPr marL="256032" indent="-256032">
-              <a:spcAft>
-                <a:spcPts val="1000"/>
-              </a:spcAft>
-              <a:buChar char="•"/>
-            </a:pPr>
-            <a:r>
-              <a:rPr sz="1800" b="0">
-                <a:solidFill>
-                  <a:srgbClr val="261C33"/>
-                </a:solidFill>
-                <a:latin typeface="Calibri"/>
-              </a:rPr>
-              <a:t>Random feature subsets decorrelate the trees and add one more point (0.830)</a:t>
-            </a:r>
-          </a:p>
-          <a:p>
-            <a:pPr marL="256032" indent="-256032">
-              <a:spcAft>
-                <a:spcPts val="1000"/>
-              </a:spcAft>
-              <a:buChar char="•"/>
-            </a:pPr>
-            <a:r>
-              <a:rPr sz="1800" b="0">
-                <a:solidFill>
-                  <a:srgbClr val="261C33"/>
-                </a:solidFill>
-                <a:latin typeface="Calibri"/>
-              </a:rPr>
-              <a:t>kNN and QDA were last: distances mixed with one-hot columns, and too many covariance parameters for 240 dislikes</a:t>
-            </a:r>
-          </a:p>
-        </p:txBody>
-      </p:sp>
     </p:spTree>
   </p:cSld>
   <p:clrMapOvr>
